--- a/EVGEN2026/assets/images/EVGEN 2026_Speakers.pptx
+++ b/EVGEN2026/assets/images/EVGEN 2026_Speakers.pptx
@@ -10,7 +10,7 @@
   <p:sldIdLst>
     <p:sldId id="263" r:id="rId2"/>
   </p:sldIdLst>
-  <p:sldSz cx="9144000" cy="5715000" type="screen16x10"/>
+  <p:sldSz cx="7772400" cy="5394325"/>
   <p:notesSz cx="6858000" cy="9144000"/>
   <p:defaultTextStyle>
     <a:defPPr marR="0" lvl="0" algn="l" rtl="0">
@@ -244,12 +244,12 @@
   <p:extLst>
     <p:ext uri="{EFAFB233-063F-42B5-8137-9DF3F51BA10A}">
       <p15:sldGuideLst xmlns:p15="http://schemas.microsoft.com/office/powerpoint/2012/main">
-        <p15:guide id="1" orient="horz" pos="1800" userDrawn="1">
+        <p15:guide id="1" orient="horz" pos="1700" userDrawn="1">
           <p15:clr>
             <a:srgbClr val="747775"/>
           </p15:clr>
         </p15:guide>
-        <p15:guide id="2" pos="2880" userDrawn="1">
+        <p15:guide id="2" pos="2448" userDrawn="1">
           <p15:clr>
             <a:srgbClr val="747775"/>
           </p15:clr>
@@ -294,8 +294,8 @@
         </p:nvSpPr>
         <p:spPr>
           <a:xfrm>
-            <a:off x="685800" y="685800"/>
-            <a:ext cx="5486400" cy="3429000"/>
+            <a:off x="958850" y="685800"/>
+            <a:ext cx="4940300" cy="3429000"/>
           </a:xfrm>
           <a:custGeom>
             <a:avLst/>
@@ -737,8 +737,8 @@
         </p:nvSpPr>
         <p:spPr>
           <a:xfrm>
-            <a:off x="685800" y="685800"/>
-            <a:ext cx="5486400" cy="3429000"/>
+            <a:off x="958850" y="685800"/>
+            <a:ext cx="4940300" cy="3429000"/>
           </a:xfrm>
           <a:custGeom>
             <a:avLst/>
@@ -853,8 +853,8 @@
         </p:nvSpPr>
         <p:spPr>
           <a:xfrm>
-            <a:off x="311708" y="827305"/>
-            <a:ext cx="8520600" cy="2280667"/>
+            <a:off x="264952" y="780890"/>
+            <a:ext cx="7242510" cy="2152696"/>
           </a:xfrm>
           <a:prstGeom prst="rect">
             <a:avLst/>
@@ -982,8 +982,8 @@
         </p:nvSpPr>
         <p:spPr>
           <a:xfrm>
-            <a:off x="311700" y="3149028"/>
-            <a:ext cx="8520600" cy="880667"/>
+            <a:off x="264946" y="2972338"/>
+            <a:ext cx="7242510" cy="831251"/>
           </a:xfrm>
           <a:prstGeom prst="rect">
             <a:avLst/>
@@ -1138,8 +1138,8 @@
         </p:nvSpPr>
         <p:spPr>
           <a:xfrm>
-            <a:off x="8472458" y="5181352"/>
-            <a:ext cx="548700" cy="437333"/>
+            <a:off x="7201593" y="4890628"/>
+            <a:ext cx="466395" cy="412794"/>
           </a:xfrm>
           <a:prstGeom prst="rect">
             <a:avLst/>
@@ -1234,8 +1234,8 @@
         </p:nvSpPr>
         <p:spPr>
           <a:xfrm>
-            <a:off x="8472458" y="5181352"/>
-            <a:ext cx="548700" cy="437333"/>
+            <a:off x="7201593" y="4890628"/>
+            <a:ext cx="466395" cy="412794"/>
           </a:xfrm>
           <a:prstGeom prst="rect">
             <a:avLst/>
@@ -1330,8 +1330,8 @@
         </p:nvSpPr>
         <p:spPr>
           <a:xfrm>
-            <a:off x="311700" y="2389834"/>
-            <a:ext cx="8520600" cy="935333"/>
+            <a:off x="264946" y="2255739"/>
+            <a:ext cx="7242510" cy="882851"/>
           </a:xfrm>
           <a:prstGeom prst="rect">
             <a:avLst/>
@@ -1459,8 +1459,8 @@
         </p:nvSpPr>
         <p:spPr>
           <a:xfrm>
-            <a:off x="8472458" y="5181352"/>
-            <a:ext cx="548700" cy="437333"/>
+            <a:off x="7201593" y="4890628"/>
+            <a:ext cx="466395" cy="412794"/>
           </a:xfrm>
           <a:prstGeom prst="rect">
             <a:avLst/>
@@ -1555,8 +1555,8 @@
         </p:nvSpPr>
         <p:spPr>
           <a:xfrm>
-            <a:off x="311700" y="494472"/>
-            <a:ext cx="8520600" cy="636333"/>
+            <a:off x="264946" y="466732"/>
+            <a:ext cx="7242510" cy="600628"/>
           </a:xfrm>
           <a:prstGeom prst="rect">
             <a:avLst/>
@@ -1684,8 +1684,8 @@
         </p:nvSpPr>
         <p:spPr>
           <a:xfrm>
-            <a:off x="311700" y="1280528"/>
-            <a:ext cx="3999900" cy="3796000"/>
+            <a:off x="264949" y="1208676"/>
+            <a:ext cx="3399915" cy="3583002"/>
           </a:xfrm>
           <a:prstGeom prst="rect">
             <a:avLst/>
@@ -1813,8 +1813,8 @@
         </p:nvSpPr>
         <p:spPr>
           <a:xfrm>
-            <a:off x="4832400" y="1280528"/>
-            <a:ext cx="3999900" cy="3796000"/>
+            <a:off x="4107545" y="1208676"/>
+            <a:ext cx="3399915" cy="3583002"/>
           </a:xfrm>
           <a:prstGeom prst="rect">
             <a:avLst/>
@@ -1942,8 +1942,8 @@
         </p:nvSpPr>
         <p:spPr>
           <a:xfrm>
-            <a:off x="8472458" y="5181352"/>
-            <a:ext cx="548700" cy="437333"/>
+            <a:off x="7201593" y="4890628"/>
+            <a:ext cx="466395" cy="412794"/>
           </a:xfrm>
           <a:prstGeom prst="rect">
             <a:avLst/>
@@ -2038,8 +2038,8 @@
         </p:nvSpPr>
         <p:spPr>
           <a:xfrm>
-            <a:off x="311700" y="494472"/>
-            <a:ext cx="8520600" cy="636333"/>
+            <a:off x="264946" y="466732"/>
+            <a:ext cx="7242510" cy="600628"/>
           </a:xfrm>
           <a:prstGeom prst="rect">
             <a:avLst/>
@@ -2167,8 +2167,8 @@
         </p:nvSpPr>
         <p:spPr>
           <a:xfrm>
-            <a:off x="8472458" y="5181352"/>
-            <a:ext cx="548700" cy="437333"/>
+            <a:off x="7201593" y="4890628"/>
+            <a:ext cx="466395" cy="412794"/>
           </a:xfrm>
           <a:prstGeom prst="rect">
             <a:avLst/>
@@ -2263,8 +2263,8 @@
         </p:nvSpPr>
         <p:spPr>
           <a:xfrm>
-            <a:off x="311700" y="617333"/>
-            <a:ext cx="2808000" cy="839667"/>
+            <a:off x="264945" y="582696"/>
+            <a:ext cx="2386800" cy="792552"/>
           </a:xfrm>
           <a:prstGeom prst="rect">
             <a:avLst/>
@@ -2392,8 +2392,8 @@
         </p:nvSpPr>
         <p:spPr>
           <a:xfrm>
-            <a:off x="311700" y="1544000"/>
-            <a:ext cx="2808000" cy="3532667"/>
+            <a:off x="264945" y="1457369"/>
+            <a:ext cx="2386800" cy="3334445"/>
           </a:xfrm>
           <a:prstGeom prst="rect">
             <a:avLst/>
@@ -2521,8 +2521,8 @@
         </p:nvSpPr>
         <p:spPr>
           <a:xfrm>
-            <a:off x="8472458" y="5181352"/>
-            <a:ext cx="548700" cy="437333"/>
+            <a:off x="7201593" y="4890628"/>
+            <a:ext cx="466395" cy="412794"/>
           </a:xfrm>
           <a:prstGeom prst="rect">
             <a:avLst/>
@@ -2617,8 +2617,8 @@
         </p:nvSpPr>
         <p:spPr>
           <a:xfrm>
-            <a:off x="490250" y="500167"/>
-            <a:ext cx="6367800" cy="4545333"/>
+            <a:off x="416713" y="472108"/>
+            <a:ext cx="5412630" cy="4290290"/>
           </a:xfrm>
           <a:prstGeom prst="rect">
             <a:avLst/>
@@ -2746,8 +2746,8 @@
         </p:nvSpPr>
         <p:spPr>
           <a:xfrm>
-            <a:off x="8472458" y="5181352"/>
-            <a:ext cx="548700" cy="437333"/>
+            <a:off x="7201593" y="4890628"/>
+            <a:ext cx="466395" cy="412794"/>
           </a:xfrm>
           <a:prstGeom prst="rect">
             <a:avLst/>
@@ -2838,8 +2838,8 @@
         </p:nvSpPr>
         <p:spPr>
           <a:xfrm>
-            <a:off x="4572000" y="-139"/>
-            <a:ext cx="4572000" cy="5715000"/>
+            <a:off x="3886200" y="-131"/>
+            <a:ext cx="3886200" cy="5394325"/>
           </a:xfrm>
           <a:prstGeom prst="rect">
             <a:avLst/>
@@ -2882,8 +2882,8 @@
         </p:nvSpPr>
         <p:spPr>
           <a:xfrm>
-            <a:off x="265500" y="1370194"/>
-            <a:ext cx="4045200" cy="1647000"/>
+            <a:off x="225675" y="1293311"/>
+            <a:ext cx="3438420" cy="1554585"/>
           </a:xfrm>
           <a:prstGeom prst="rect">
             <a:avLst/>
@@ -3011,8 +3011,8 @@
         </p:nvSpPr>
         <p:spPr>
           <a:xfrm>
-            <a:off x="265500" y="3114528"/>
-            <a:ext cx="4045200" cy="1372333"/>
+            <a:off x="225675" y="2939773"/>
+            <a:ext cx="3438420" cy="1295330"/>
           </a:xfrm>
           <a:prstGeom prst="rect">
             <a:avLst/>
@@ -3167,8 +3167,8 @@
         </p:nvSpPr>
         <p:spPr>
           <a:xfrm>
-            <a:off x="4939500" y="804528"/>
-            <a:ext cx="3837000" cy="4105667"/>
+            <a:off x="4198576" y="759393"/>
+            <a:ext cx="3261450" cy="3875293"/>
           </a:xfrm>
           <a:prstGeom prst="rect">
             <a:avLst/>
@@ -3296,8 +3296,8 @@
         </p:nvSpPr>
         <p:spPr>
           <a:xfrm>
-            <a:off x="8472458" y="5181352"/>
-            <a:ext cx="548700" cy="437333"/>
+            <a:off x="7201593" y="4890628"/>
+            <a:ext cx="466395" cy="412794"/>
           </a:xfrm>
           <a:prstGeom prst="rect">
             <a:avLst/>
@@ -3392,8 +3392,8 @@
         </p:nvSpPr>
         <p:spPr>
           <a:xfrm>
-            <a:off x="311700" y="4700639"/>
-            <a:ext cx="5998800" cy="672333"/>
+            <a:off x="264945" y="4436888"/>
+            <a:ext cx="5098980" cy="634608"/>
           </a:xfrm>
           <a:prstGeom prst="rect">
             <a:avLst/>
@@ -3436,8 +3436,8 @@
         </p:nvSpPr>
         <p:spPr>
           <a:xfrm>
-            <a:off x="8472458" y="5181352"/>
-            <a:ext cx="548700" cy="437333"/>
+            <a:off x="7201593" y="4890628"/>
+            <a:ext cx="466395" cy="412794"/>
           </a:xfrm>
           <a:prstGeom prst="rect">
             <a:avLst/>
@@ -3532,8 +3532,8 @@
         </p:nvSpPr>
         <p:spPr>
           <a:xfrm>
-            <a:off x="311700" y="1229028"/>
-            <a:ext cx="8520600" cy="2181667"/>
+            <a:off x="264946" y="1160073"/>
+            <a:ext cx="7242510" cy="2059251"/>
           </a:xfrm>
           <a:prstGeom prst="rect">
             <a:avLst/>
@@ -3663,8 +3663,8 @@
         </p:nvSpPr>
         <p:spPr>
           <a:xfrm>
-            <a:off x="311700" y="3502472"/>
-            <a:ext cx="8520600" cy="1445333"/>
+            <a:off x="264946" y="3305951"/>
+            <a:ext cx="7242510" cy="1364234"/>
           </a:xfrm>
           <a:prstGeom prst="rect">
             <a:avLst/>
@@ -3792,8 +3792,8 @@
         </p:nvSpPr>
         <p:spPr>
           <a:xfrm>
-            <a:off x="8472458" y="5181352"/>
-            <a:ext cx="548700" cy="437333"/>
+            <a:off x="7201593" y="4890628"/>
+            <a:ext cx="466395" cy="412794"/>
           </a:xfrm>
           <a:prstGeom prst="rect">
             <a:avLst/>
@@ -3896,8 +3896,8 @@
         </p:nvSpPr>
         <p:spPr>
           <a:xfrm>
-            <a:off x="311700" y="494472"/>
-            <a:ext cx="8520600" cy="636333"/>
+            <a:off x="264946" y="466732"/>
+            <a:ext cx="7242510" cy="600628"/>
           </a:xfrm>
           <a:prstGeom prst="rect">
             <a:avLst/>
@@ -4092,8 +4092,8 @@
         </p:nvSpPr>
         <p:spPr>
           <a:xfrm>
-            <a:off x="311700" y="1280528"/>
-            <a:ext cx="8520600" cy="3796000"/>
+            <a:off x="264946" y="1208676"/>
+            <a:ext cx="7242510" cy="3583002"/>
           </a:xfrm>
           <a:prstGeom prst="rect">
             <a:avLst/>
@@ -4315,8 +4315,8 @@
         </p:nvSpPr>
         <p:spPr>
           <a:xfrm>
-            <a:off x="8472458" y="5181352"/>
-            <a:ext cx="548700" cy="437333"/>
+            <a:off x="7201593" y="4890628"/>
+            <a:ext cx="466395" cy="412794"/>
           </a:xfrm>
           <a:prstGeom prst="rect">
             <a:avLst/>
@@ -5141,10 +5141,10 @@
       </p:grpSpPr>
       <p:grpSp>
         <p:nvGrpSpPr>
-          <p:cNvPr id="2" name="Group 1">
+          <p:cNvPr id="69" name="Group 68">
             <a:extLst>
               <a:ext uri="{FF2B5EF4-FFF2-40B4-BE49-F238E27FC236}">
-                <a16:creationId xmlns:a16="http://schemas.microsoft.com/office/drawing/2014/main" id="{2E5B5266-A3C5-6D63-1E0F-1C19AFE4D09A}"/>
+                <a16:creationId xmlns:a16="http://schemas.microsoft.com/office/drawing/2014/main" id="{37C82F77-ED25-FA0F-2615-EE47A7940B4D}"/>
               </a:ext>
             </a:extLst>
           </p:cNvPr>
@@ -5153,57 +5153,18 @@
         </p:nvGrpSpPr>
         <p:grpSpPr>
           <a:xfrm>
-            <a:off x="959756" y="199462"/>
+            <a:off x="35225" y="97518"/>
             <a:ext cx="7701969" cy="5229789"/>
-            <a:chOff x="959755" y="-86289"/>
+            <a:chOff x="721015" y="242605"/>
             <a:chExt cx="7701969" cy="5229789"/>
           </a:xfrm>
-          <a:effectLst>
-            <a:outerShdw blurRad="50800" dist="38100" dir="18900000" algn="bl" rotWithShape="0">
-              <a:prstClr val="black">
-                <a:alpha val="40000"/>
-              </a:prstClr>
-            </a:outerShdw>
-          </a:effectLst>
         </p:grpSpPr>
-        <p:pic>
-          <p:nvPicPr>
-            <p:cNvPr id="5" name="Picture 4" descr="A cityscape with mountains in the background&#10;&#10;Description automatically generated">
+        <p:grpSp>
+          <p:nvGrpSpPr>
+            <p:cNvPr id="2" name="Group 1">
               <a:extLst>
                 <a:ext uri="{FF2B5EF4-FFF2-40B4-BE49-F238E27FC236}">
-                  <a16:creationId xmlns:a16="http://schemas.microsoft.com/office/drawing/2014/main" id="{2D283CCF-02E6-CCD7-190A-FCFA796D0349}"/>
-                </a:ext>
-              </a:extLst>
-            </p:cNvPr>
-            <p:cNvPicPr>
-              <a:picLocks noChangeAspect="1"/>
-            </p:cNvPicPr>
-            <p:nvPr/>
-          </p:nvPicPr>
-          <p:blipFill>
-            <a:blip r:embed="rId3">
-              <a:alphaModFix amt="35000"/>
-            </a:blip>
-            <a:stretch>
-              <a:fillRect/>
-            </a:stretch>
-          </p:blipFill>
-          <p:spPr>
-            <a:xfrm>
-              <a:off x="1258474" y="244881"/>
-              <a:ext cx="7123525" cy="4519627"/>
-            </a:xfrm>
-            <a:prstGeom prst="rect">
-              <a:avLst/>
-            </a:prstGeom>
-          </p:spPr>
-        </p:pic>
-        <p:grpSp>
-          <p:nvGrpSpPr>
-            <p:cNvPr id="7" name="Group 6">
-              <a:extLst>
-                <a:ext uri="{FF2B5EF4-FFF2-40B4-BE49-F238E27FC236}">
-                  <a16:creationId xmlns:a16="http://schemas.microsoft.com/office/drawing/2014/main" id="{D518944E-F96C-7D64-B619-793520FE79BC}"/>
+                  <a16:creationId xmlns:a16="http://schemas.microsoft.com/office/drawing/2014/main" id="{2E5B5266-A3C5-6D63-1E0F-1C19AFE4D09A}"/>
                 </a:ext>
               </a:extLst>
             </p:cNvPr>
@@ -5212,730 +5173,25 @@
           </p:nvGrpSpPr>
           <p:grpSpPr>
             <a:xfrm>
-              <a:off x="959755" y="-86289"/>
+              <a:off x="721015" y="242605"/>
               <a:ext cx="7701969" cy="5229789"/>
               <a:chOff x="959755" y="-86289"/>
               <a:chExt cx="7701969" cy="5229789"/>
             </a:xfrm>
+            <a:effectLst>
+              <a:outerShdw blurRad="50800" dist="38100" dir="18900000" algn="bl" rotWithShape="0">
+                <a:prstClr val="black">
+                  <a:alpha val="40000"/>
+                </a:prstClr>
+              </a:outerShdw>
+            </a:effectLst>
           </p:grpSpPr>
-          <p:sp>
-            <p:nvSpPr>
-              <p:cNvPr id="19" name="Google Shape;55;p13">
+          <p:pic>
+            <p:nvPicPr>
+              <p:cNvPr id="5" name="Picture 4" descr="A cityscape with mountains in the background&#10;&#10;Description automatically generated">
                 <a:extLst>
                   <a:ext uri="{FF2B5EF4-FFF2-40B4-BE49-F238E27FC236}">
-                    <a16:creationId xmlns:a16="http://schemas.microsoft.com/office/drawing/2014/main" id="{68FD8F27-8B82-B92E-2929-B355A013F350}"/>
-                  </a:ext>
-                </a:extLst>
-              </p:cNvPr>
-              <p:cNvSpPr txBox="1"/>
-              <p:nvPr/>
-            </p:nvSpPr>
-            <p:spPr>
-              <a:xfrm>
-                <a:off x="1416280" y="4507260"/>
-                <a:ext cx="6767965" cy="486108"/>
-              </a:xfrm>
-              <a:prstGeom prst="rect">
-                <a:avLst/>
-              </a:prstGeom>
-              <a:solidFill>
-                <a:schemeClr val="accent1">
-                  <a:lumMod val="40000"/>
-                  <a:lumOff val="60000"/>
-                </a:schemeClr>
-              </a:solidFill>
-              <a:ln>
-                <a:noFill/>
-              </a:ln>
-            </p:spPr>
-            <p:txBody>
-              <a:bodyPr spcFirstLastPara="1" wrap="square" lIns="91425" tIns="91425" rIns="91425" bIns="91425" anchor="t" anchorCtr="0">
-                <a:noAutofit/>
-              </a:bodyPr>
-              <a:lstStyle/>
-              <a:p>
-                <a:pPr algn="ctr">
-                  <a:lnSpc>
-                    <a:spcPct val="150000"/>
-                  </a:lnSpc>
-                </a:pPr>
-                <a:endParaRPr sz="1600" b="1">
-                  <a:solidFill>
-                    <a:schemeClr val="lt2"/>
-                  </a:solidFill>
-                </a:endParaRPr>
-              </a:p>
-            </p:txBody>
-          </p:sp>
-          <p:sp>
-            <p:nvSpPr>
-              <p:cNvPr id="3" name="Freeform: Shape 2">
-                <a:extLst>
-                  <a:ext uri="{FF2B5EF4-FFF2-40B4-BE49-F238E27FC236}">
-                    <a16:creationId xmlns:a16="http://schemas.microsoft.com/office/drawing/2014/main" id="{81093064-9490-A40D-7DA2-1E9469093333}"/>
-                  </a:ext>
-                </a:extLst>
-              </p:cNvPr>
-              <p:cNvSpPr>
-                <a:spLocks noChangeAspect="1"/>
-              </p:cNvSpPr>
-              <p:nvPr/>
-            </p:nvSpPr>
-            <p:spPr>
-              <a:xfrm>
-                <a:off x="959755" y="-86289"/>
-                <a:ext cx="7701969" cy="5212306"/>
-              </a:xfrm>
-              <a:custGeom>
-                <a:avLst/>
-                <a:gdLst>
-                  <a:gd name="connsiteX0" fmla="*/ 1220884 w 7357475"/>
-                  <a:gd name="connsiteY0" fmla="*/ 210805 h 4979170"/>
-                  <a:gd name="connsiteX1" fmla="*/ 313611 w 7357475"/>
-                  <a:gd name="connsiteY1" fmla="*/ 1118078 h 4979170"/>
-                  <a:gd name="connsiteX2" fmla="*/ 313611 w 7357475"/>
-                  <a:gd name="connsiteY2" fmla="*/ 3861091 h 4979170"/>
-                  <a:gd name="connsiteX3" fmla="*/ 1220884 w 7357475"/>
-                  <a:gd name="connsiteY3" fmla="*/ 4768364 h 4979170"/>
-                  <a:gd name="connsiteX4" fmla="*/ 6140818 w 7357475"/>
-                  <a:gd name="connsiteY4" fmla="*/ 4768364 h 4979170"/>
-                  <a:gd name="connsiteX5" fmla="*/ 7048091 w 7357475"/>
-                  <a:gd name="connsiteY5" fmla="*/ 3861091 h 4979170"/>
-                  <a:gd name="connsiteX6" fmla="*/ 7048091 w 7357475"/>
-                  <a:gd name="connsiteY6" fmla="*/ 1118078 h 4979170"/>
-                  <a:gd name="connsiteX7" fmla="*/ 6140818 w 7357475"/>
-                  <a:gd name="connsiteY7" fmla="*/ 210805 h 4979170"/>
-                  <a:gd name="connsiteX8" fmla="*/ 1054887 w 7357475"/>
-                  <a:gd name="connsiteY8" fmla="*/ 0 h 4979170"/>
-                  <a:gd name="connsiteX9" fmla="*/ 6302588 w 7357475"/>
-                  <a:gd name="connsiteY9" fmla="*/ 0 h 4979170"/>
-                  <a:gd name="connsiteX10" fmla="*/ 7357475 w 7357475"/>
-                  <a:gd name="connsiteY10" fmla="*/ 1054887 h 4979170"/>
-                  <a:gd name="connsiteX11" fmla="*/ 7357475 w 7357475"/>
-                  <a:gd name="connsiteY11" fmla="*/ 3924283 h 4979170"/>
-                  <a:gd name="connsiteX12" fmla="*/ 6302588 w 7357475"/>
-                  <a:gd name="connsiteY12" fmla="*/ 4979170 h 4979170"/>
-                  <a:gd name="connsiteX13" fmla="*/ 1054887 w 7357475"/>
-                  <a:gd name="connsiteY13" fmla="*/ 4979170 h 4979170"/>
-                  <a:gd name="connsiteX14" fmla="*/ 0 w 7357475"/>
-                  <a:gd name="connsiteY14" fmla="*/ 3924283 h 4979170"/>
-                  <a:gd name="connsiteX15" fmla="*/ 0 w 7357475"/>
-                  <a:gd name="connsiteY15" fmla="*/ 1054887 h 4979170"/>
-                  <a:gd name="connsiteX16" fmla="*/ 1054887 w 7357475"/>
-                  <a:gd name="connsiteY16" fmla="*/ 0 h 4979170"/>
-                </a:gdLst>
-                <a:ahLst/>
-                <a:cxnLst>
-                  <a:cxn ang="0">
-                    <a:pos x="connsiteX0" y="connsiteY0"/>
-                  </a:cxn>
-                  <a:cxn ang="0">
-                    <a:pos x="connsiteX1" y="connsiteY1"/>
-                  </a:cxn>
-                  <a:cxn ang="0">
-                    <a:pos x="connsiteX2" y="connsiteY2"/>
-                  </a:cxn>
-                  <a:cxn ang="0">
-                    <a:pos x="connsiteX3" y="connsiteY3"/>
-                  </a:cxn>
-                  <a:cxn ang="0">
-                    <a:pos x="connsiteX4" y="connsiteY4"/>
-                  </a:cxn>
-                  <a:cxn ang="0">
-                    <a:pos x="connsiteX5" y="connsiteY5"/>
-                  </a:cxn>
-                  <a:cxn ang="0">
-                    <a:pos x="connsiteX6" y="connsiteY6"/>
-                  </a:cxn>
-                  <a:cxn ang="0">
-                    <a:pos x="connsiteX7" y="connsiteY7"/>
-                  </a:cxn>
-                  <a:cxn ang="0">
-                    <a:pos x="connsiteX8" y="connsiteY8"/>
-                  </a:cxn>
-                  <a:cxn ang="0">
-                    <a:pos x="connsiteX9" y="connsiteY9"/>
-                  </a:cxn>
-                  <a:cxn ang="0">
-                    <a:pos x="connsiteX10" y="connsiteY10"/>
-                  </a:cxn>
-                  <a:cxn ang="0">
-                    <a:pos x="connsiteX11" y="connsiteY11"/>
-                  </a:cxn>
-                  <a:cxn ang="0">
-                    <a:pos x="connsiteX12" y="connsiteY12"/>
-                  </a:cxn>
-                  <a:cxn ang="0">
-                    <a:pos x="connsiteX13" y="connsiteY13"/>
-                  </a:cxn>
-                  <a:cxn ang="0">
-                    <a:pos x="connsiteX14" y="connsiteY14"/>
-                  </a:cxn>
-                  <a:cxn ang="0">
-                    <a:pos x="connsiteX15" y="connsiteY15"/>
-                  </a:cxn>
-                  <a:cxn ang="0">
-                    <a:pos x="connsiteX16" y="connsiteY16"/>
-                  </a:cxn>
-                </a:cxnLst>
-                <a:rect l="l" t="t" r="r" b="b"/>
-                <a:pathLst>
-                  <a:path w="7357475" h="4979170">
-                    <a:moveTo>
-                      <a:pt x="1220884" y="210805"/>
-                    </a:moveTo>
-                    <a:cubicBezTo>
-                      <a:pt x="719811" y="210805"/>
-                      <a:pt x="313611" y="617005"/>
-                      <a:pt x="313611" y="1118078"/>
-                    </a:cubicBezTo>
-                    <a:lnTo>
-                      <a:pt x="313611" y="3861091"/>
-                    </a:lnTo>
-                    <a:cubicBezTo>
-                      <a:pt x="313611" y="4362164"/>
-                      <a:pt x="719811" y="4768364"/>
-                      <a:pt x="1220884" y="4768364"/>
-                    </a:cubicBezTo>
-                    <a:lnTo>
-                      <a:pt x="6140818" y="4768364"/>
-                    </a:lnTo>
-                    <a:cubicBezTo>
-                      <a:pt x="6641891" y="4768364"/>
-                      <a:pt x="7048091" y="4362164"/>
-                      <a:pt x="7048091" y="3861091"/>
-                    </a:cubicBezTo>
-                    <a:lnTo>
-                      <a:pt x="7048091" y="1118078"/>
-                    </a:lnTo>
-                    <a:cubicBezTo>
-                      <a:pt x="7048091" y="617005"/>
-                      <a:pt x="6641891" y="210805"/>
-                      <a:pt x="6140818" y="210805"/>
-                    </a:cubicBezTo>
-                    <a:close/>
-                    <a:moveTo>
-                      <a:pt x="1054887" y="0"/>
-                    </a:moveTo>
-                    <a:lnTo>
-                      <a:pt x="6302588" y="0"/>
-                    </a:lnTo>
-                    <a:cubicBezTo>
-                      <a:pt x="6885186" y="0"/>
-                      <a:pt x="7357475" y="472289"/>
-                      <a:pt x="7357475" y="1054887"/>
-                    </a:cubicBezTo>
-                    <a:lnTo>
-                      <a:pt x="7357475" y="3924283"/>
-                    </a:lnTo>
-                    <a:cubicBezTo>
-                      <a:pt x="7357475" y="4506881"/>
-                      <a:pt x="6885186" y="4979170"/>
-                      <a:pt x="6302588" y="4979170"/>
-                    </a:cubicBezTo>
-                    <a:lnTo>
-                      <a:pt x="1054887" y="4979170"/>
-                    </a:lnTo>
-                    <a:cubicBezTo>
-                      <a:pt x="472289" y="4979170"/>
-                      <a:pt x="0" y="4506881"/>
-                      <a:pt x="0" y="3924283"/>
-                    </a:cubicBezTo>
-                    <a:lnTo>
-                      <a:pt x="0" y="1054887"/>
-                    </a:lnTo>
-                    <a:cubicBezTo>
-                      <a:pt x="0" y="472289"/>
-                      <a:pt x="472289" y="0"/>
-                      <a:pt x="1054887" y="0"/>
-                    </a:cubicBezTo>
-                    <a:close/>
-                  </a:path>
-                </a:pathLst>
-              </a:custGeom>
-              <a:solidFill>
-                <a:srgbClr val="B3CEFB"/>
-              </a:solidFill>
-              <a:ln>
-                <a:noFill/>
-              </a:ln>
-            </p:spPr>
-            <p:style>
-              <a:lnRef idx="2">
-                <a:schemeClr val="accent1">
-                  <a:shade val="15000"/>
-                </a:schemeClr>
-              </a:lnRef>
-              <a:fillRef idx="1">
-                <a:schemeClr val="accent1"/>
-              </a:fillRef>
-              <a:effectRef idx="0">
-                <a:schemeClr val="accent1"/>
-              </a:effectRef>
-              <a:fontRef idx="minor">
-                <a:schemeClr val="lt1"/>
-              </a:fontRef>
-            </p:style>
-            <p:txBody>
-              <a:bodyPr wrap="square" rtlCol="0" anchor="ctr">
-                <a:noAutofit/>
-              </a:bodyPr>
-              <a:lstStyle/>
-              <a:p>
-                <a:pPr algn="ctr"/>
-                <a:endParaRPr lang="en-IN"/>
-              </a:p>
-            </p:txBody>
-          </p:sp>
-          <p:sp>
-            <p:nvSpPr>
-              <p:cNvPr id="6" name="Google Shape;55;p13">
-                <a:extLst>
-                  <a:ext uri="{FF2B5EF4-FFF2-40B4-BE49-F238E27FC236}">
-                    <a16:creationId xmlns:a16="http://schemas.microsoft.com/office/drawing/2014/main" id="{D0CA0BBD-B3F7-A50F-69F6-632206CD11E4}"/>
-                  </a:ext>
-                </a:extLst>
-              </p:cNvPr>
-              <p:cNvSpPr txBox="1"/>
-              <p:nvPr/>
-            </p:nvSpPr>
-            <p:spPr>
-              <a:xfrm>
-                <a:off x="1202640" y="7989"/>
-                <a:ext cx="7426395" cy="1149470"/>
-              </a:xfrm>
-              <a:custGeom>
-                <a:avLst/>
-                <a:gdLst>
-                  <a:gd name="connsiteX0" fmla="*/ 0 w 7296460"/>
-                  <a:gd name="connsiteY0" fmla="*/ 0 h 1230999"/>
-                  <a:gd name="connsiteX1" fmla="*/ 7296460 w 7296460"/>
-                  <a:gd name="connsiteY1" fmla="*/ 0 h 1230999"/>
-                  <a:gd name="connsiteX2" fmla="*/ 7296460 w 7296460"/>
-                  <a:gd name="connsiteY2" fmla="*/ 1230999 h 1230999"/>
-                  <a:gd name="connsiteX3" fmla="*/ 0 w 7296460"/>
-                  <a:gd name="connsiteY3" fmla="*/ 1230999 h 1230999"/>
-                  <a:gd name="connsiteX4" fmla="*/ 0 w 7296460"/>
-                  <a:gd name="connsiteY4" fmla="*/ 0 h 1230999"/>
-                  <a:gd name="connsiteX0" fmla="*/ 144780 w 7296460"/>
-                  <a:gd name="connsiteY0" fmla="*/ 99060 h 1230999"/>
-                  <a:gd name="connsiteX1" fmla="*/ 7296460 w 7296460"/>
-                  <a:gd name="connsiteY1" fmla="*/ 0 h 1230999"/>
-                  <a:gd name="connsiteX2" fmla="*/ 7296460 w 7296460"/>
-                  <a:gd name="connsiteY2" fmla="*/ 1230999 h 1230999"/>
-                  <a:gd name="connsiteX3" fmla="*/ 0 w 7296460"/>
-                  <a:gd name="connsiteY3" fmla="*/ 1230999 h 1230999"/>
-                  <a:gd name="connsiteX4" fmla="*/ 144780 w 7296460"/>
-                  <a:gd name="connsiteY4" fmla="*/ 99060 h 1230999"/>
-                  <a:gd name="connsiteX0" fmla="*/ 144780 w 7347260"/>
-                  <a:gd name="connsiteY0" fmla="*/ 99060 h 1230999"/>
-                  <a:gd name="connsiteX1" fmla="*/ 7296460 w 7347260"/>
-                  <a:gd name="connsiteY1" fmla="*/ 0 h 1230999"/>
-                  <a:gd name="connsiteX2" fmla="*/ 7296460 w 7347260"/>
-                  <a:gd name="connsiteY2" fmla="*/ 1230999 h 1230999"/>
-                  <a:gd name="connsiteX3" fmla="*/ 0 w 7347260"/>
-                  <a:gd name="connsiteY3" fmla="*/ 1230999 h 1230999"/>
-                  <a:gd name="connsiteX4" fmla="*/ 144780 w 7347260"/>
-                  <a:gd name="connsiteY4" fmla="*/ 99060 h 1230999"/>
-                  <a:gd name="connsiteX0" fmla="*/ 144780 w 7347260"/>
-                  <a:gd name="connsiteY0" fmla="*/ 125755 h 1257694"/>
-                  <a:gd name="connsiteX1" fmla="*/ 804220 w 7347260"/>
-                  <a:gd name="connsiteY1" fmla="*/ 0 h 1257694"/>
-                  <a:gd name="connsiteX2" fmla="*/ 7296460 w 7347260"/>
-                  <a:gd name="connsiteY2" fmla="*/ 26695 h 1257694"/>
-                  <a:gd name="connsiteX3" fmla="*/ 7296460 w 7347260"/>
-                  <a:gd name="connsiteY3" fmla="*/ 1257694 h 1257694"/>
-                  <a:gd name="connsiteX4" fmla="*/ 0 w 7347260"/>
-                  <a:gd name="connsiteY4" fmla="*/ 1257694 h 1257694"/>
-                  <a:gd name="connsiteX5" fmla="*/ 144780 w 7347260"/>
-                  <a:gd name="connsiteY5" fmla="*/ 125755 h 1257694"/>
-                  <a:gd name="connsiteX0" fmla="*/ 144780 w 7347260"/>
-                  <a:gd name="connsiteY0" fmla="*/ 144484 h 1276423"/>
-                  <a:gd name="connsiteX1" fmla="*/ 804220 w 7347260"/>
-                  <a:gd name="connsiteY1" fmla="*/ 18729 h 1276423"/>
-                  <a:gd name="connsiteX2" fmla="*/ 7296460 w 7347260"/>
-                  <a:gd name="connsiteY2" fmla="*/ 45424 h 1276423"/>
-                  <a:gd name="connsiteX3" fmla="*/ 7296460 w 7347260"/>
-                  <a:gd name="connsiteY3" fmla="*/ 1276423 h 1276423"/>
-                  <a:gd name="connsiteX4" fmla="*/ 0 w 7347260"/>
-                  <a:gd name="connsiteY4" fmla="*/ 1276423 h 1276423"/>
-                  <a:gd name="connsiteX5" fmla="*/ 144780 w 7347260"/>
-                  <a:gd name="connsiteY5" fmla="*/ 144484 h 1276423"/>
-                  <a:gd name="connsiteX0" fmla="*/ 144780 w 7347260"/>
-                  <a:gd name="connsiteY0" fmla="*/ 194608 h 1326547"/>
-                  <a:gd name="connsiteX1" fmla="*/ 926140 w 7347260"/>
-                  <a:gd name="connsiteY1" fmla="*/ 15513 h 1326547"/>
-                  <a:gd name="connsiteX2" fmla="*/ 7296460 w 7347260"/>
-                  <a:gd name="connsiteY2" fmla="*/ 95548 h 1326547"/>
-                  <a:gd name="connsiteX3" fmla="*/ 7296460 w 7347260"/>
-                  <a:gd name="connsiteY3" fmla="*/ 1326547 h 1326547"/>
-                  <a:gd name="connsiteX4" fmla="*/ 0 w 7347260"/>
-                  <a:gd name="connsiteY4" fmla="*/ 1326547 h 1326547"/>
-                  <a:gd name="connsiteX5" fmla="*/ 144780 w 7347260"/>
-                  <a:gd name="connsiteY5" fmla="*/ 194608 h 1326547"/>
-                  <a:gd name="connsiteX0" fmla="*/ 198120 w 7347260"/>
-                  <a:gd name="connsiteY0" fmla="*/ 223701 h 1325160"/>
-                  <a:gd name="connsiteX1" fmla="*/ 926140 w 7347260"/>
-                  <a:gd name="connsiteY1" fmla="*/ 14126 h 1325160"/>
-                  <a:gd name="connsiteX2" fmla="*/ 7296460 w 7347260"/>
-                  <a:gd name="connsiteY2" fmla="*/ 94161 h 1325160"/>
-                  <a:gd name="connsiteX3" fmla="*/ 7296460 w 7347260"/>
-                  <a:gd name="connsiteY3" fmla="*/ 1325160 h 1325160"/>
-                  <a:gd name="connsiteX4" fmla="*/ 0 w 7347260"/>
-                  <a:gd name="connsiteY4" fmla="*/ 1325160 h 1325160"/>
-                  <a:gd name="connsiteX5" fmla="*/ 198120 w 7347260"/>
-                  <a:gd name="connsiteY5" fmla="*/ 223701 h 1325160"/>
-                  <a:gd name="connsiteX0" fmla="*/ 266700 w 7415840"/>
-                  <a:gd name="connsiteY0" fmla="*/ 223701 h 1325160"/>
-                  <a:gd name="connsiteX1" fmla="*/ 994720 w 7415840"/>
-                  <a:gd name="connsiteY1" fmla="*/ 14126 h 1325160"/>
-                  <a:gd name="connsiteX2" fmla="*/ 7365040 w 7415840"/>
-                  <a:gd name="connsiteY2" fmla="*/ 94161 h 1325160"/>
-                  <a:gd name="connsiteX3" fmla="*/ 7365040 w 7415840"/>
-                  <a:gd name="connsiteY3" fmla="*/ 1325160 h 1325160"/>
-                  <a:gd name="connsiteX4" fmla="*/ 0 w 7415840"/>
-                  <a:gd name="connsiteY4" fmla="*/ 1248960 h 1325160"/>
-                  <a:gd name="connsiteX5" fmla="*/ 266700 w 7415840"/>
-                  <a:gd name="connsiteY5" fmla="*/ 223701 h 1325160"/>
-                  <a:gd name="connsiteX0" fmla="*/ 267095 w 7416235"/>
-                  <a:gd name="connsiteY0" fmla="*/ 223701 h 1325160"/>
-                  <a:gd name="connsiteX1" fmla="*/ 995115 w 7416235"/>
-                  <a:gd name="connsiteY1" fmla="*/ 14126 h 1325160"/>
-                  <a:gd name="connsiteX2" fmla="*/ 7365435 w 7416235"/>
-                  <a:gd name="connsiteY2" fmla="*/ 94161 h 1325160"/>
-                  <a:gd name="connsiteX3" fmla="*/ 7365435 w 7416235"/>
-                  <a:gd name="connsiteY3" fmla="*/ 1325160 h 1325160"/>
-                  <a:gd name="connsiteX4" fmla="*/ 395 w 7416235"/>
-                  <a:gd name="connsiteY4" fmla="*/ 1248960 h 1325160"/>
-                  <a:gd name="connsiteX5" fmla="*/ 267095 w 7416235"/>
-                  <a:gd name="connsiteY5" fmla="*/ 223701 h 1325160"/>
-                  <a:gd name="connsiteX0" fmla="*/ 267095 w 7365435"/>
-                  <a:gd name="connsiteY0" fmla="*/ 223701 h 1325160"/>
-                  <a:gd name="connsiteX1" fmla="*/ 995115 w 7365435"/>
-                  <a:gd name="connsiteY1" fmla="*/ 14126 h 1325160"/>
-                  <a:gd name="connsiteX2" fmla="*/ 7243515 w 7365435"/>
-                  <a:gd name="connsiteY2" fmla="*/ 117021 h 1325160"/>
-                  <a:gd name="connsiteX3" fmla="*/ 7365435 w 7365435"/>
-                  <a:gd name="connsiteY3" fmla="*/ 1325160 h 1325160"/>
-                  <a:gd name="connsiteX4" fmla="*/ 395 w 7365435"/>
-                  <a:gd name="connsiteY4" fmla="*/ 1248960 h 1325160"/>
-                  <a:gd name="connsiteX5" fmla="*/ 267095 w 7365435"/>
-                  <a:gd name="connsiteY5" fmla="*/ 223701 h 1325160"/>
-                  <a:gd name="connsiteX0" fmla="*/ 267095 w 7373071"/>
-                  <a:gd name="connsiteY0" fmla="*/ 223701 h 1325160"/>
-                  <a:gd name="connsiteX1" fmla="*/ 995115 w 7373071"/>
-                  <a:gd name="connsiteY1" fmla="*/ 14126 h 1325160"/>
-                  <a:gd name="connsiteX2" fmla="*/ 7243515 w 7373071"/>
-                  <a:gd name="connsiteY2" fmla="*/ 117021 h 1325160"/>
-                  <a:gd name="connsiteX3" fmla="*/ 7365435 w 7373071"/>
-                  <a:gd name="connsiteY3" fmla="*/ 1325160 h 1325160"/>
-                  <a:gd name="connsiteX4" fmla="*/ 395 w 7373071"/>
-                  <a:gd name="connsiteY4" fmla="*/ 1248960 h 1325160"/>
-                  <a:gd name="connsiteX5" fmla="*/ 267095 w 7373071"/>
-                  <a:gd name="connsiteY5" fmla="*/ 223701 h 1325160"/>
-                  <a:gd name="connsiteX0" fmla="*/ 267095 w 7365435"/>
-                  <a:gd name="connsiteY0" fmla="*/ 223701 h 1325160"/>
-                  <a:gd name="connsiteX1" fmla="*/ 995115 w 7365435"/>
-                  <a:gd name="connsiteY1" fmla="*/ 14126 h 1325160"/>
-                  <a:gd name="connsiteX2" fmla="*/ 7136835 w 7365435"/>
-                  <a:gd name="connsiteY2" fmla="*/ 117021 h 1325160"/>
-                  <a:gd name="connsiteX3" fmla="*/ 7365435 w 7365435"/>
-                  <a:gd name="connsiteY3" fmla="*/ 1325160 h 1325160"/>
-                  <a:gd name="connsiteX4" fmla="*/ 395 w 7365435"/>
-                  <a:gd name="connsiteY4" fmla="*/ 1248960 h 1325160"/>
-                  <a:gd name="connsiteX5" fmla="*/ 267095 w 7365435"/>
-                  <a:gd name="connsiteY5" fmla="*/ 223701 h 1325160"/>
-                  <a:gd name="connsiteX0" fmla="*/ 267095 w 7426395"/>
-                  <a:gd name="connsiteY0" fmla="*/ 223701 h 1348020"/>
-                  <a:gd name="connsiteX1" fmla="*/ 995115 w 7426395"/>
-                  <a:gd name="connsiteY1" fmla="*/ 14126 h 1348020"/>
-                  <a:gd name="connsiteX2" fmla="*/ 7136835 w 7426395"/>
-                  <a:gd name="connsiteY2" fmla="*/ 117021 h 1348020"/>
-                  <a:gd name="connsiteX3" fmla="*/ 7426395 w 7426395"/>
-                  <a:gd name="connsiteY3" fmla="*/ 1348020 h 1348020"/>
-                  <a:gd name="connsiteX4" fmla="*/ 395 w 7426395"/>
-                  <a:gd name="connsiteY4" fmla="*/ 1248960 h 1348020"/>
-                  <a:gd name="connsiteX5" fmla="*/ 267095 w 7426395"/>
-                  <a:gd name="connsiteY5" fmla="*/ 223701 h 1348020"/>
-                  <a:gd name="connsiteX0" fmla="*/ 267095 w 7426395"/>
-                  <a:gd name="connsiteY0" fmla="*/ 223701 h 1348020"/>
-                  <a:gd name="connsiteX1" fmla="*/ 995115 w 7426395"/>
-                  <a:gd name="connsiteY1" fmla="*/ 14126 h 1348020"/>
-                  <a:gd name="connsiteX2" fmla="*/ 7136835 w 7426395"/>
-                  <a:gd name="connsiteY2" fmla="*/ 117021 h 1348020"/>
-                  <a:gd name="connsiteX3" fmla="*/ 7426395 w 7426395"/>
-                  <a:gd name="connsiteY3" fmla="*/ 1348020 h 1348020"/>
-                  <a:gd name="connsiteX4" fmla="*/ 395 w 7426395"/>
-                  <a:gd name="connsiteY4" fmla="*/ 1248960 h 1348020"/>
-                  <a:gd name="connsiteX5" fmla="*/ 267095 w 7426395"/>
-                  <a:gd name="connsiteY5" fmla="*/ 223701 h 1348020"/>
-                </a:gdLst>
-                <a:ahLst/>
-                <a:cxnLst>
-                  <a:cxn ang="0">
-                    <a:pos x="connsiteX0" y="connsiteY0"/>
-                  </a:cxn>
-                  <a:cxn ang="0">
-                    <a:pos x="connsiteX1" y="connsiteY1"/>
-                  </a:cxn>
-                  <a:cxn ang="0">
-                    <a:pos x="connsiteX2" y="connsiteY2"/>
-                  </a:cxn>
-                  <a:cxn ang="0">
-                    <a:pos x="connsiteX3" y="connsiteY3"/>
-                  </a:cxn>
-                  <a:cxn ang="0">
-                    <a:pos x="connsiteX4" y="connsiteY4"/>
-                  </a:cxn>
-                  <a:cxn ang="0">
-                    <a:pos x="connsiteX5" y="connsiteY5"/>
-                  </a:cxn>
-                </a:cxnLst>
-                <a:rect l="l" t="t" r="r" b="b"/>
-                <a:pathLst>
-                  <a:path w="7426395" h="1348020">
-                    <a:moveTo>
-                      <a:pt x="267095" y="223701"/>
-                    </a:moveTo>
-                    <a:cubicBezTo>
-                      <a:pt x="469128" y="219883"/>
-                      <a:pt x="800702" y="-65876"/>
-                      <a:pt x="995115" y="14126"/>
-                    </a:cubicBezTo>
-                    <a:lnTo>
-                      <a:pt x="7136835" y="117021"/>
-                    </a:lnTo>
-                    <a:cubicBezTo>
-                      <a:pt x="7312095" y="603554"/>
-                      <a:pt x="7380675" y="549067"/>
-                      <a:pt x="7426395" y="1348020"/>
-                    </a:cubicBezTo>
-                    <a:lnTo>
-                      <a:pt x="395" y="1248960"/>
-                    </a:lnTo>
-                    <a:cubicBezTo>
-                      <a:pt x="-9765" y="556687"/>
-                      <a:pt x="178195" y="565454"/>
-                      <a:pt x="267095" y="223701"/>
-                    </a:cubicBezTo>
-                    <a:close/>
-                  </a:path>
-                </a:pathLst>
-              </a:custGeom>
-              <a:gradFill flip="none" rotWithShape="1">
-                <a:gsLst>
-                  <a:gs pos="70000">
-                    <a:srgbClr val="B3CEFB"/>
-                  </a:gs>
-                  <a:gs pos="23000">
-                    <a:srgbClr val="B3CEFB"/>
-                  </a:gs>
-                  <a:gs pos="0">
-                    <a:srgbClr val="B3CEFB"/>
-                  </a:gs>
-                  <a:gs pos="97000">
-                    <a:srgbClr val="B3CEFB">
-                      <a:alpha val="41000"/>
-                    </a:srgbClr>
-                  </a:gs>
-                </a:gsLst>
-                <a:lin ang="5400000" scaled="1"/>
-                <a:tileRect/>
-              </a:gradFill>
-              <a:ln>
-                <a:noFill/>
-              </a:ln>
-              <a:effectLst>
-                <a:softEdge rad="63500"/>
-              </a:effectLst>
-            </p:spPr>
-            <p:txBody>
-              <a:bodyPr spcFirstLastPara="1" wrap="square" lIns="91425" tIns="91425" rIns="91425" bIns="91425" anchor="t" anchorCtr="0">
-                <a:noAutofit/>
-              </a:bodyPr>
-              <a:lstStyle/>
-              <a:p>
-                <a:pPr algn="ctr">
-                  <a:lnSpc>
-                    <a:spcPct val="150000"/>
-                  </a:lnSpc>
-                </a:pPr>
-                <a:endParaRPr sz="1500" b="1">
-                  <a:solidFill>
-                    <a:schemeClr val="lt2"/>
-                  </a:solidFill>
-                </a:endParaRPr>
-              </a:p>
-            </p:txBody>
-          </p:sp>
-          <p:sp>
-            <p:nvSpPr>
-              <p:cNvPr id="55" name="Google Shape;55;p13"/>
-              <p:cNvSpPr txBox="1"/>
-              <p:nvPr/>
-            </p:nvSpPr>
-            <p:spPr>
-              <a:xfrm>
-                <a:off x="1918229" y="-47852"/>
-                <a:ext cx="6148247" cy="1014911"/>
-              </a:xfrm>
-              <a:prstGeom prst="rect">
-                <a:avLst/>
-              </a:prstGeom>
-              <a:gradFill flip="none" rotWithShape="1">
-                <a:gsLst>
-                  <a:gs pos="70000">
-                    <a:srgbClr val="B3CEFB"/>
-                  </a:gs>
-                  <a:gs pos="23000">
-                    <a:srgbClr val="B3CEFB"/>
-                  </a:gs>
-                  <a:gs pos="0">
-                    <a:srgbClr val="B3CEFB"/>
-                  </a:gs>
-                  <a:gs pos="97000">
-                    <a:srgbClr val="B3CEFB">
-                      <a:alpha val="41000"/>
-                    </a:srgbClr>
-                  </a:gs>
-                </a:gsLst>
-                <a:lin ang="5400000" scaled="1"/>
-                <a:tileRect/>
-              </a:gradFill>
-              <a:ln>
-                <a:noFill/>
-              </a:ln>
-              <a:effectLst>
-                <a:softEdge rad="63500"/>
-              </a:effectLst>
-            </p:spPr>
-            <p:txBody>
-              <a:bodyPr spcFirstLastPara="1" wrap="square" lIns="91425" tIns="91425" rIns="91425" bIns="91425" anchor="t" anchorCtr="0">
-                <a:noAutofit/>
-              </a:bodyPr>
-              <a:lstStyle/>
-              <a:p>
-                <a:pPr lvl="0" algn="ctr"/>
-                <a:r>
-                  <a:rPr lang="en" sz="2000" b="1" dirty="0">
-                    <a:solidFill>
-                      <a:srgbClr val="FF5050"/>
-                    </a:solidFill>
-                    <a:effectLst>
-                      <a:outerShdw blurRad="50800" dist="38100" dir="5400000" algn="t" rotWithShape="0">
-                        <a:prstClr val="black">
-                          <a:alpha val="40000"/>
-                        </a:prstClr>
-                      </a:outerShdw>
-                    </a:effectLst>
-                    <a:latin typeface="Univers Condensed" panose="020B0506020202050204" pitchFamily="34" charset="0"/>
-                  </a:rPr>
-                  <a:t>EVGEN 2026</a:t>
-                </a:r>
-                <a:r>
-                  <a:rPr lang="en" sz="2000" b="1" dirty="0">
-                    <a:solidFill>
-                      <a:srgbClr val="FF5050"/>
-                    </a:solidFill>
-                    <a:effectLst>
-                      <a:innerShdw blurRad="114300">
-                        <a:prstClr val="black"/>
-                      </a:innerShdw>
-                    </a:effectLst>
-                    <a:latin typeface="Univers Condensed" panose="020B0506020202050204" pitchFamily="34" charset="0"/>
-                  </a:rPr>
-                  <a:t>:</a:t>
-                </a:r>
-                <a:r>
-                  <a:rPr lang="en" sz="2000" b="1" dirty="0">
-                    <a:effectLst>
-                      <a:innerShdw blurRad="114300">
-                        <a:prstClr val="black"/>
-                      </a:innerShdw>
-                    </a:effectLst>
-                    <a:latin typeface="Univers Condensed" panose="020B0506020202050204" pitchFamily="34" charset="0"/>
-                  </a:rPr>
-                  <a:t> </a:t>
-                </a:r>
-                <a:r>
-                  <a:rPr lang="en" sz="2000" b="1" dirty="0">
-                    <a:solidFill>
-                      <a:srgbClr val="002060"/>
-                    </a:solidFill>
-                    <a:effectLst>
-                      <a:innerShdw blurRad="114300">
-                        <a:prstClr val="black"/>
-                      </a:innerShdw>
-                    </a:effectLst>
-                    <a:latin typeface="Univers Condensed" panose="020B0506020202050204" pitchFamily="34" charset="0"/>
-                  </a:rPr>
-                  <a:t>The 2</a:t>
-                </a:r>
-                <a:r>
-                  <a:rPr lang="en" sz="2000" b="1" baseline="30000" dirty="0">
-                    <a:solidFill>
-                      <a:srgbClr val="002060"/>
-                    </a:solidFill>
-                    <a:effectLst>
-                      <a:innerShdw blurRad="114300">
-                        <a:prstClr val="black"/>
-                      </a:innerShdw>
-                    </a:effectLst>
-                    <a:latin typeface="Univers Condensed" panose="020B0506020202050204" pitchFamily="34" charset="0"/>
-                  </a:rPr>
-                  <a:t>nd</a:t>
-                </a:r>
-                <a:r>
-                  <a:rPr lang="en" sz="2000" b="1" dirty="0">
-                    <a:solidFill>
-                      <a:srgbClr val="002060"/>
-                    </a:solidFill>
-                    <a:effectLst>
-                      <a:innerShdw blurRad="114300">
-                        <a:prstClr val="black"/>
-                      </a:innerShdw>
-                    </a:effectLst>
-                    <a:latin typeface="Univers Condensed" panose="020B0506020202050204" pitchFamily="34" charset="0"/>
-                  </a:rPr>
-                  <a:t> Workshop on </a:t>
-                </a:r>
-              </a:p>
-              <a:p>
-                <a:pPr algn="ctr"/>
-                <a:r>
-                  <a:rPr lang="en" sz="2000" b="1" dirty="0">
-                    <a:solidFill>
-                      <a:srgbClr val="002060"/>
-                    </a:solidFill>
-                    <a:effectLst>
-                      <a:innerShdw blurRad="114300">
-                        <a:prstClr val="black"/>
-                      </a:innerShdw>
-                    </a:effectLst>
-                    <a:latin typeface="Univers Condensed" panose="020B0506020202050204" pitchFamily="34" charset="0"/>
-                  </a:rPr>
-                  <a:t>“Event-based Vision in the Era of Generative AI”: Transforming Perception and Visual Innovation</a:t>
-                </a:r>
-                <a:endParaRPr sz="2000" b="1" dirty="0">
-                  <a:solidFill>
-                    <a:srgbClr val="002060"/>
-                  </a:solidFill>
-                  <a:effectLst>
-                    <a:innerShdw blurRad="114300">
-                      <a:prstClr val="black"/>
-                    </a:innerShdw>
-                  </a:effectLst>
-                  <a:latin typeface="Univers Condensed" panose="020B0506020202050204" pitchFamily="34" charset="0"/>
-                </a:endParaRPr>
-              </a:p>
-            </p:txBody>
-          </p:sp>
-          <p:pic>
-            <p:nvPicPr>
-              <p:cNvPr id="13" name="Picture 12">
-                <a:extLst>
-                  <a:ext uri="{FF2B5EF4-FFF2-40B4-BE49-F238E27FC236}">
-                    <a16:creationId xmlns:a16="http://schemas.microsoft.com/office/drawing/2014/main" id="{6C60AAF9-F297-743C-3352-0A3B0426AB50}"/>
+                    <a16:creationId xmlns:a16="http://schemas.microsoft.com/office/drawing/2014/main" id="{2D283CCF-02E6-CCD7-190A-FCFA796D0349}"/>
                   </a:ext>
                 </a:extLst>
               </p:cNvPr>
@@ -5945,14 +5201,17 @@
               <p:nvPr/>
             </p:nvPicPr>
             <p:blipFill>
-              <a:blip r:embed="rId4"/>
-              <a:srcRect/>
-              <a:stretch/>
+              <a:blip r:embed="rId3">
+                <a:alphaModFix amt="35000"/>
+              </a:blip>
+              <a:stretch>
+                <a:fillRect/>
+              </a:stretch>
             </p:blipFill>
             <p:spPr>
               <a:xfrm>
-                <a:off x="3981339" y="4508400"/>
-                <a:ext cx="1868995" cy="572654"/>
+                <a:off x="1258474" y="244881"/>
+                <a:ext cx="7123525" cy="4519627"/>
               </a:xfrm>
               <a:prstGeom prst="rect">
                 <a:avLst/>
@@ -5961,10 +5220,10 @@
           </p:pic>
           <p:grpSp>
             <p:nvGrpSpPr>
-              <p:cNvPr id="20" name="Group 19">
+              <p:cNvPr id="7" name="Group 6">
                 <a:extLst>
                   <a:ext uri="{FF2B5EF4-FFF2-40B4-BE49-F238E27FC236}">
-                    <a16:creationId xmlns:a16="http://schemas.microsoft.com/office/drawing/2014/main" id="{AAE80CEA-FD27-779D-4829-B8644539A4B2}"/>
+                    <a16:creationId xmlns:a16="http://schemas.microsoft.com/office/drawing/2014/main" id="{D518944E-F96C-7D64-B619-793520FE79BC}"/>
                   </a:ext>
                 </a:extLst>
               </p:cNvPr>
@@ -5973,306 +5232,117 @@
             </p:nvGrpSpPr>
             <p:grpSpPr>
               <a:xfrm>
-                <a:off x="982615" y="435281"/>
-                <a:ext cx="1472997" cy="4666466"/>
-                <a:chOff x="982615" y="458141"/>
-                <a:chExt cx="1472997" cy="4666466"/>
+                <a:off x="959755" y="-86289"/>
+                <a:ext cx="7701969" cy="5229789"/>
+                <a:chOff x="959755" y="-86289"/>
+                <a:chExt cx="7701969" cy="5229789"/>
               </a:xfrm>
             </p:grpSpPr>
-            <p:grpSp>
-              <p:nvGrpSpPr>
-                <p:cNvPr id="15" name="Group 14">
+            <p:sp>
+              <p:nvSpPr>
+                <p:cNvPr id="19" name="Google Shape;55;p13">
                   <a:extLst>
                     <a:ext uri="{FF2B5EF4-FFF2-40B4-BE49-F238E27FC236}">
-                      <a16:creationId xmlns:a16="http://schemas.microsoft.com/office/drawing/2014/main" id="{1AEBB532-50E4-1676-A661-86951EB1318C}"/>
+                      <a16:creationId xmlns:a16="http://schemas.microsoft.com/office/drawing/2014/main" id="{68FD8F27-8B82-B92E-2929-B355A013F350}"/>
                     </a:ext>
                   </a:extLst>
                 </p:cNvPr>
-                <p:cNvGrpSpPr/>
-                <p:nvPr/>
-              </p:nvGrpSpPr>
-              <p:grpSpPr>
-                <a:xfrm>
-                  <a:off x="1618627" y="1934054"/>
-                  <a:ext cx="836985" cy="2092227"/>
-                  <a:chOff x="1262508" y="1552164"/>
-                  <a:chExt cx="831072" cy="1807966"/>
-                </a:xfrm>
-              </p:grpSpPr>
-              <p:sp>
-                <p:nvSpPr>
-                  <p:cNvPr id="10" name="Rectangle: Rounded Corners 9">
-                    <a:extLst>
-                      <a:ext uri="{FF2B5EF4-FFF2-40B4-BE49-F238E27FC236}">
-                        <a16:creationId xmlns:a16="http://schemas.microsoft.com/office/drawing/2014/main" id="{5AAC981C-CAEF-8B99-4630-1660832D8F59}"/>
-                      </a:ext>
-                    </a:extLst>
-                  </p:cNvPr>
-                  <p:cNvSpPr/>
-                  <p:nvPr/>
-                </p:nvSpPr>
-                <p:spPr>
-                  <a:xfrm rot="3331528">
-                    <a:off x="1484948" y="2751499"/>
-                    <a:ext cx="386191" cy="831072"/>
-                  </a:xfrm>
-                  <a:prstGeom prst="roundRect">
-                    <a:avLst>
-                      <a:gd name="adj" fmla="val 50000"/>
-                    </a:avLst>
-                  </a:prstGeom>
-                  <a:solidFill>
-                    <a:schemeClr val="accent5"/>
-                  </a:solidFill>
-                  <a:ln>
-                    <a:noFill/>
-                  </a:ln>
-                </p:spPr>
-                <p:style>
-                  <a:lnRef idx="2">
-                    <a:schemeClr val="accent1">
-                      <a:shade val="15000"/>
-                    </a:schemeClr>
-                  </a:lnRef>
-                  <a:fillRef idx="1">
-                    <a:schemeClr val="accent1"/>
-                  </a:fillRef>
-                  <a:effectRef idx="0">
-                    <a:schemeClr val="accent1"/>
-                  </a:effectRef>
-                  <a:fontRef idx="minor">
-                    <a:schemeClr val="lt1"/>
-                  </a:fontRef>
-                </p:style>
-                <p:txBody>
-                  <a:bodyPr rtlCol="0" anchor="ctr"/>
-                  <a:lstStyle/>
-                  <a:p>
-                    <a:pPr algn="ctr"/>
-                    <a:endParaRPr lang="en-IN"/>
-                  </a:p>
-                </p:txBody>
-              </p:sp>
-              <p:sp>
-                <p:nvSpPr>
-                  <p:cNvPr id="11" name="Rectangle: Rounded Corners 10">
-                    <a:extLst>
-                      <a:ext uri="{FF2B5EF4-FFF2-40B4-BE49-F238E27FC236}">
-                        <a16:creationId xmlns:a16="http://schemas.microsoft.com/office/drawing/2014/main" id="{1DA2ABD9-E1DA-5173-D12E-BBF2CBDBF1F1}"/>
-                      </a:ext>
-                    </a:extLst>
-                  </p:cNvPr>
-                  <p:cNvSpPr/>
-                  <p:nvPr/>
-                </p:nvSpPr>
-                <p:spPr>
-                  <a:xfrm>
-                    <a:off x="1745199" y="1552164"/>
-                    <a:ext cx="328686" cy="1614871"/>
-                  </a:xfrm>
-                  <a:prstGeom prst="roundRect">
-                    <a:avLst>
-                      <a:gd name="adj" fmla="val 50000"/>
-                    </a:avLst>
-                  </a:prstGeom>
-                  <a:solidFill>
-                    <a:schemeClr val="accent5"/>
-                  </a:solidFill>
-                  <a:ln>
-                    <a:noFill/>
-                  </a:ln>
-                </p:spPr>
-                <p:style>
-                  <a:lnRef idx="2">
-                    <a:schemeClr val="accent1">
-                      <a:shade val="15000"/>
-                    </a:schemeClr>
-                  </a:lnRef>
-                  <a:fillRef idx="1">
-                    <a:schemeClr val="accent1"/>
-                  </a:fillRef>
-                  <a:effectRef idx="0">
-                    <a:schemeClr val="accent1"/>
-                  </a:effectRef>
-                  <a:fontRef idx="minor">
-                    <a:schemeClr val="lt1"/>
-                  </a:fontRef>
-                </p:style>
-                <p:txBody>
-                  <a:bodyPr rtlCol="0" anchor="ctr"/>
-                  <a:lstStyle/>
-                  <a:p>
-                    <a:pPr algn="ctr"/>
-                    <a:endParaRPr lang="en-IN"/>
-                  </a:p>
-                </p:txBody>
-              </p:sp>
-            </p:grpSp>
-            <p:grpSp>
-              <p:nvGrpSpPr>
-                <p:cNvPr id="14" name="Group 13">
-                  <a:extLst>
-                    <a:ext uri="{FF2B5EF4-FFF2-40B4-BE49-F238E27FC236}">
-                      <a16:creationId xmlns:a16="http://schemas.microsoft.com/office/drawing/2014/main" id="{AB0168B4-B5EC-023E-8795-19F5EED4BCC5}"/>
-                    </a:ext>
-                  </a:extLst>
-                </p:cNvPr>
-                <p:cNvGrpSpPr/>
-                <p:nvPr/>
-              </p:nvGrpSpPr>
-              <p:grpSpPr>
-                <a:xfrm>
-                  <a:off x="982615" y="793686"/>
-                  <a:ext cx="645393" cy="2126528"/>
-                  <a:chOff x="630990" y="566732"/>
-                  <a:chExt cx="640833" cy="1837607"/>
-                </a:xfrm>
-              </p:grpSpPr>
-              <p:sp>
-                <p:nvSpPr>
-                  <p:cNvPr id="8" name="Rectangle: Rounded Corners 7">
-                    <a:extLst>
-                      <a:ext uri="{FF2B5EF4-FFF2-40B4-BE49-F238E27FC236}">
-                        <a16:creationId xmlns:a16="http://schemas.microsoft.com/office/drawing/2014/main" id="{18CEBBEF-72CB-1F82-FA6E-0811583BB7CD}"/>
-                      </a:ext>
-                    </a:extLst>
-                  </p:cNvPr>
-                  <p:cNvSpPr/>
-                  <p:nvPr/>
-                </p:nvSpPr>
-                <p:spPr>
-                  <a:xfrm rot="18268472" flipH="1">
-                    <a:off x="789739" y="1922254"/>
-                    <a:ext cx="323336" cy="640833"/>
-                  </a:xfrm>
-                  <a:prstGeom prst="roundRect">
-                    <a:avLst>
-                      <a:gd name="adj" fmla="val 50000"/>
-                    </a:avLst>
-                  </a:prstGeom>
-                  <a:solidFill>
-                    <a:schemeClr val="accent5"/>
-                  </a:solidFill>
-                  <a:ln>
-                    <a:noFill/>
-                  </a:ln>
-                </p:spPr>
-                <p:style>
-                  <a:lnRef idx="2">
-                    <a:schemeClr val="accent1">
-                      <a:shade val="15000"/>
-                    </a:schemeClr>
-                  </a:lnRef>
-                  <a:fillRef idx="1">
-                    <a:schemeClr val="accent1"/>
-                  </a:fillRef>
-                  <a:effectRef idx="0">
-                    <a:schemeClr val="accent1"/>
-                  </a:effectRef>
-                  <a:fontRef idx="minor">
-                    <a:schemeClr val="lt1"/>
-                  </a:fontRef>
-                </p:style>
-                <p:txBody>
-                  <a:bodyPr rtlCol="0" anchor="ctr"/>
-                  <a:lstStyle/>
-                  <a:p>
-                    <a:pPr algn="ctr"/>
-                    <a:endParaRPr lang="en-IN"/>
-                  </a:p>
-                </p:txBody>
-              </p:sp>
-              <p:sp>
-                <p:nvSpPr>
-                  <p:cNvPr id="9" name="Rectangle: Rounded Corners 8">
-                    <a:extLst>
-                      <a:ext uri="{FF2B5EF4-FFF2-40B4-BE49-F238E27FC236}">
-                        <a16:creationId xmlns:a16="http://schemas.microsoft.com/office/drawing/2014/main" id="{DB239E47-75DA-1052-8C46-C244E5E6A4D3}"/>
-                      </a:ext>
-                    </a:extLst>
-                  </p:cNvPr>
-                  <p:cNvSpPr/>
-                  <p:nvPr/>
-                </p:nvSpPr>
-                <p:spPr>
-                  <a:xfrm flipH="1">
-                    <a:off x="650524" y="566732"/>
-                    <a:ext cx="301059" cy="1713806"/>
-                  </a:xfrm>
-                  <a:prstGeom prst="roundRect">
-                    <a:avLst>
-                      <a:gd name="adj" fmla="val 50000"/>
-                    </a:avLst>
-                  </a:prstGeom>
-                  <a:solidFill>
-                    <a:schemeClr val="accent5"/>
-                  </a:solidFill>
-                  <a:ln>
-                    <a:noFill/>
-                  </a:ln>
-                </p:spPr>
-                <p:style>
-                  <a:lnRef idx="2">
-                    <a:schemeClr val="accent1">
-                      <a:shade val="15000"/>
-                    </a:schemeClr>
-                  </a:lnRef>
-                  <a:fillRef idx="1">
-                    <a:schemeClr val="accent1"/>
-                  </a:fillRef>
-                  <a:effectRef idx="0">
-                    <a:schemeClr val="accent1"/>
-                  </a:effectRef>
-                  <a:fontRef idx="minor">
-                    <a:schemeClr val="lt1"/>
-                  </a:fontRef>
-                </p:style>
-                <p:txBody>
-                  <a:bodyPr rtlCol="0" anchor="ctr"/>
-                  <a:lstStyle/>
-                  <a:p>
-                    <a:pPr algn="ctr"/>
-                    <a:endParaRPr lang="en-IN"/>
-                  </a:p>
-                </p:txBody>
-              </p:sp>
-            </p:grpSp>
-            <p:sp>
-              <p:nvSpPr>
-                <p:cNvPr id="17" name="Freeform: Shape 16">
-                  <a:extLst>
-                    <a:ext uri="{FF2B5EF4-FFF2-40B4-BE49-F238E27FC236}">
-                      <a16:creationId xmlns:a16="http://schemas.microsoft.com/office/drawing/2014/main" id="{5A13CF75-903E-B806-DFF2-361CD607FADA}"/>
-                    </a:ext>
-                  </a:extLst>
-                </p:cNvPr>
-                <p:cNvSpPr/>
+                <p:cNvSpPr txBox="1"/>
                 <p:nvPr/>
               </p:nvSpPr>
               <p:spPr>
                 <a:xfrm>
-                  <a:off x="1439140" y="458141"/>
-                  <a:ext cx="459416" cy="4666466"/>
+                  <a:off x="1416280" y="4507260"/>
+                  <a:ext cx="6767965" cy="486108"/>
+                </a:xfrm>
+                <a:prstGeom prst="rect">
+                  <a:avLst/>
+                </a:prstGeom>
+                <a:solidFill>
+                  <a:schemeClr val="accent1">
+                    <a:lumMod val="40000"/>
+                    <a:lumOff val="60000"/>
+                  </a:schemeClr>
+                </a:solidFill>
+                <a:ln>
+                  <a:noFill/>
+                </a:ln>
+              </p:spPr>
+              <p:txBody>
+                <a:bodyPr spcFirstLastPara="1" wrap="square" lIns="91425" tIns="91425" rIns="91425" bIns="91425" anchor="t" anchorCtr="0">
+                  <a:noAutofit/>
+                </a:bodyPr>
+                <a:lstStyle/>
+                <a:p>
+                  <a:pPr algn="ctr">
+                    <a:lnSpc>
+                      <a:spcPct val="150000"/>
+                    </a:lnSpc>
+                  </a:pPr>
+                  <a:endParaRPr sz="1600" b="1">
+                    <a:solidFill>
+                      <a:schemeClr val="lt2"/>
+                    </a:solidFill>
+                  </a:endParaRPr>
+                </a:p>
+              </p:txBody>
+            </p:sp>
+            <p:sp>
+              <p:nvSpPr>
+                <p:cNvPr id="3" name="Freeform: Shape 2">
+                  <a:extLst>
+                    <a:ext uri="{FF2B5EF4-FFF2-40B4-BE49-F238E27FC236}">
+                      <a16:creationId xmlns:a16="http://schemas.microsoft.com/office/drawing/2014/main" id="{81093064-9490-A40D-7DA2-1E9469093333}"/>
+                    </a:ext>
+                  </a:extLst>
+                </p:cNvPr>
+                <p:cNvSpPr>
+                  <a:spLocks noChangeAspect="1"/>
+                </p:cNvSpPr>
+                <p:nvPr/>
+              </p:nvSpPr>
+              <p:spPr>
+                <a:xfrm>
+                  <a:off x="959755" y="-86289"/>
+                  <a:ext cx="7701969" cy="5212306"/>
                 </a:xfrm>
                 <a:custGeom>
                   <a:avLst/>
                   <a:gdLst>
-                    <a:gd name="connsiteX0" fmla="*/ 229708 w 459416"/>
-                    <a:gd name="connsiteY0" fmla="*/ 0 h 4666466"/>
-                    <a:gd name="connsiteX1" fmla="*/ 459416 w 459416"/>
-                    <a:gd name="connsiteY1" fmla="*/ 229708 h 4666466"/>
-                    <a:gd name="connsiteX2" fmla="*/ 459415 w 459416"/>
-                    <a:gd name="connsiteY2" fmla="*/ 4666466 h 4666466"/>
-                    <a:gd name="connsiteX3" fmla="*/ 278359 w 459416"/>
-                    <a:gd name="connsiteY3" fmla="*/ 4648214 h 4666466"/>
-                    <a:gd name="connsiteX4" fmla="*/ 96690 w 459416"/>
-                    <a:gd name="connsiteY4" fmla="*/ 4591821 h 4666466"/>
-                    <a:gd name="connsiteX5" fmla="*/ 0 w 459416"/>
-                    <a:gd name="connsiteY5" fmla="*/ 4539339 h 4666466"/>
-                    <a:gd name="connsiteX6" fmla="*/ 0 w 459416"/>
-                    <a:gd name="connsiteY6" fmla="*/ 229708 h 4666466"/>
-                    <a:gd name="connsiteX7" fmla="*/ 229708 w 459416"/>
-                    <a:gd name="connsiteY7" fmla="*/ 0 h 4666466"/>
+                    <a:gd name="connsiteX0" fmla="*/ 1220884 w 7357475"/>
+                    <a:gd name="connsiteY0" fmla="*/ 210805 h 4979170"/>
+                    <a:gd name="connsiteX1" fmla="*/ 313611 w 7357475"/>
+                    <a:gd name="connsiteY1" fmla="*/ 1118078 h 4979170"/>
+                    <a:gd name="connsiteX2" fmla="*/ 313611 w 7357475"/>
+                    <a:gd name="connsiteY2" fmla="*/ 3861091 h 4979170"/>
+                    <a:gd name="connsiteX3" fmla="*/ 1220884 w 7357475"/>
+                    <a:gd name="connsiteY3" fmla="*/ 4768364 h 4979170"/>
+                    <a:gd name="connsiteX4" fmla="*/ 6140818 w 7357475"/>
+                    <a:gd name="connsiteY4" fmla="*/ 4768364 h 4979170"/>
+                    <a:gd name="connsiteX5" fmla="*/ 7048091 w 7357475"/>
+                    <a:gd name="connsiteY5" fmla="*/ 3861091 h 4979170"/>
+                    <a:gd name="connsiteX6" fmla="*/ 7048091 w 7357475"/>
+                    <a:gd name="connsiteY6" fmla="*/ 1118078 h 4979170"/>
+                    <a:gd name="connsiteX7" fmla="*/ 6140818 w 7357475"/>
+                    <a:gd name="connsiteY7" fmla="*/ 210805 h 4979170"/>
+                    <a:gd name="connsiteX8" fmla="*/ 1054887 w 7357475"/>
+                    <a:gd name="connsiteY8" fmla="*/ 0 h 4979170"/>
+                    <a:gd name="connsiteX9" fmla="*/ 6302588 w 7357475"/>
+                    <a:gd name="connsiteY9" fmla="*/ 0 h 4979170"/>
+                    <a:gd name="connsiteX10" fmla="*/ 7357475 w 7357475"/>
+                    <a:gd name="connsiteY10" fmla="*/ 1054887 h 4979170"/>
+                    <a:gd name="connsiteX11" fmla="*/ 7357475 w 7357475"/>
+                    <a:gd name="connsiteY11" fmla="*/ 3924283 h 4979170"/>
+                    <a:gd name="connsiteX12" fmla="*/ 6302588 w 7357475"/>
+                    <a:gd name="connsiteY12" fmla="*/ 4979170 h 4979170"/>
+                    <a:gd name="connsiteX13" fmla="*/ 1054887 w 7357475"/>
+                    <a:gd name="connsiteY13" fmla="*/ 4979170 h 4979170"/>
+                    <a:gd name="connsiteX14" fmla="*/ 0 w 7357475"/>
+                    <a:gd name="connsiteY14" fmla="*/ 3924283 h 4979170"/>
+                    <a:gd name="connsiteX15" fmla="*/ 0 w 7357475"/>
+                    <a:gd name="connsiteY15" fmla="*/ 1054887 h 4979170"/>
+                    <a:gd name="connsiteX16" fmla="*/ 1054887 w 7357475"/>
+                    <a:gd name="connsiteY16" fmla="*/ 0 h 4979170"/>
                   </a:gdLst>
                   <a:ahLst/>
                   <a:cxnLst>
@@ -6300,46 +5370,111 @@
                     <a:cxn ang="0">
                       <a:pos x="connsiteX7" y="connsiteY7"/>
                     </a:cxn>
+                    <a:cxn ang="0">
+                      <a:pos x="connsiteX8" y="connsiteY8"/>
+                    </a:cxn>
+                    <a:cxn ang="0">
+                      <a:pos x="connsiteX9" y="connsiteY9"/>
+                    </a:cxn>
+                    <a:cxn ang="0">
+                      <a:pos x="connsiteX10" y="connsiteY10"/>
+                    </a:cxn>
+                    <a:cxn ang="0">
+                      <a:pos x="connsiteX11" y="connsiteY11"/>
+                    </a:cxn>
+                    <a:cxn ang="0">
+                      <a:pos x="connsiteX12" y="connsiteY12"/>
+                    </a:cxn>
+                    <a:cxn ang="0">
+                      <a:pos x="connsiteX13" y="connsiteY13"/>
+                    </a:cxn>
+                    <a:cxn ang="0">
+                      <a:pos x="connsiteX14" y="connsiteY14"/>
+                    </a:cxn>
+                    <a:cxn ang="0">
+                      <a:pos x="connsiteX15" y="connsiteY15"/>
+                    </a:cxn>
+                    <a:cxn ang="0">
+                      <a:pos x="connsiteX16" y="connsiteY16"/>
+                    </a:cxn>
                   </a:cxnLst>
                   <a:rect l="l" t="t" r="r" b="b"/>
                   <a:pathLst>
-                    <a:path w="459416" h="4666466">
+                    <a:path w="7357475" h="4979170">
                       <a:moveTo>
-                        <a:pt x="229708" y="0"/>
+                        <a:pt x="1220884" y="210805"/>
                       </a:moveTo>
                       <a:cubicBezTo>
-                        <a:pt x="356572" y="0"/>
-                        <a:pt x="459416" y="102844"/>
-                        <a:pt x="459416" y="229708"/>
+                        <a:pt x="719811" y="210805"/>
+                        <a:pt x="313611" y="617005"/>
+                        <a:pt x="313611" y="1118078"/>
                       </a:cubicBezTo>
                       <a:lnTo>
-                        <a:pt x="459415" y="4666466"/>
-                      </a:lnTo>
-                      <a:lnTo>
-                        <a:pt x="278359" y="4648214"/>
+                        <a:pt x="313611" y="3861091"/>
                       </a:lnTo>
                       <a:cubicBezTo>
-                        <a:pt x="215356" y="4635322"/>
-                        <a:pt x="154584" y="4616308"/>
-                        <a:pt x="96690" y="4591821"/>
+                        <a:pt x="313611" y="4362164"/>
+                        <a:pt x="719811" y="4768364"/>
+                        <a:pt x="1220884" y="4768364"/>
                       </a:cubicBezTo>
                       <a:lnTo>
-                        <a:pt x="0" y="4539339"/>
-                      </a:lnTo>
-                      <a:lnTo>
-                        <a:pt x="0" y="229708"/>
+                        <a:pt x="6140818" y="4768364"/>
                       </a:lnTo>
                       <a:cubicBezTo>
-                        <a:pt x="0" y="102844"/>
-                        <a:pt x="102844" y="0"/>
-                        <a:pt x="229708" y="0"/>
+                        <a:pt x="6641891" y="4768364"/>
+                        <a:pt x="7048091" y="4362164"/>
+                        <a:pt x="7048091" y="3861091"/>
+                      </a:cubicBezTo>
+                      <a:lnTo>
+                        <a:pt x="7048091" y="1118078"/>
+                      </a:lnTo>
+                      <a:cubicBezTo>
+                        <a:pt x="7048091" y="617005"/>
+                        <a:pt x="6641891" y="210805"/>
+                        <a:pt x="6140818" y="210805"/>
+                      </a:cubicBezTo>
+                      <a:close/>
+                      <a:moveTo>
+                        <a:pt x="1054887" y="0"/>
+                      </a:moveTo>
+                      <a:lnTo>
+                        <a:pt x="6302588" y="0"/>
+                      </a:lnTo>
+                      <a:cubicBezTo>
+                        <a:pt x="6885186" y="0"/>
+                        <a:pt x="7357475" y="472289"/>
+                        <a:pt x="7357475" y="1054887"/>
+                      </a:cubicBezTo>
+                      <a:lnTo>
+                        <a:pt x="7357475" y="3924283"/>
+                      </a:lnTo>
+                      <a:cubicBezTo>
+                        <a:pt x="7357475" y="4506881"/>
+                        <a:pt x="6885186" y="4979170"/>
+                        <a:pt x="6302588" y="4979170"/>
+                      </a:cubicBezTo>
+                      <a:lnTo>
+                        <a:pt x="1054887" y="4979170"/>
+                      </a:lnTo>
+                      <a:cubicBezTo>
+                        <a:pt x="472289" y="4979170"/>
+                        <a:pt x="0" y="4506881"/>
+                        <a:pt x="0" y="3924283"/>
+                      </a:cubicBezTo>
+                      <a:lnTo>
+                        <a:pt x="0" y="1054887"/>
+                      </a:lnTo>
+                      <a:cubicBezTo>
+                        <a:pt x="0" y="472289"/>
+                        <a:pt x="472289" y="0"/>
+                        <a:pt x="1054887" y="0"/>
                       </a:cubicBezTo>
                       <a:close/>
                     </a:path>
                   </a:pathLst>
                 </a:custGeom>
                 <a:solidFill>
-                  <a:srgbClr val="0097A7"/>
+                  <a:srgbClr val="B3CEFB"/>
                 </a:solidFill>
                 <a:ln>
                   <a:noFill/>
@@ -6372,13 +5507,1059 @@
                 </a:p>
               </p:txBody>
             </p:sp>
+            <p:sp>
+              <p:nvSpPr>
+                <p:cNvPr id="6" name="Google Shape;55;p13">
+                  <a:extLst>
+                    <a:ext uri="{FF2B5EF4-FFF2-40B4-BE49-F238E27FC236}">
+                      <a16:creationId xmlns:a16="http://schemas.microsoft.com/office/drawing/2014/main" id="{D0CA0BBD-B3F7-A50F-69F6-632206CD11E4}"/>
+                    </a:ext>
+                  </a:extLst>
+                </p:cNvPr>
+                <p:cNvSpPr txBox="1"/>
+                <p:nvPr/>
+              </p:nvSpPr>
+              <p:spPr>
+                <a:xfrm>
+                  <a:off x="1202640" y="7989"/>
+                  <a:ext cx="7426395" cy="1149470"/>
+                </a:xfrm>
+                <a:custGeom>
+                  <a:avLst/>
+                  <a:gdLst>
+                    <a:gd name="connsiteX0" fmla="*/ 0 w 7296460"/>
+                    <a:gd name="connsiteY0" fmla="*/ 0 h 1230999"/>
+                    <a:gd name="connsiteX1" fmla="*/ 7296460 w 7296460"/>
+                    <a:gd name="connsiteY1" fmla="*/ 0 h 1230999"/>
+                    <a:gd name="connsiteX2" fmla="*/ 7296460 w 7296460"/>
+                    <a:gd name="connsiteY2" fmla="*/ 1230999 h 1230999"/>
+                    <a:gd name="connsiteX3" fmla="*/ 0 w 7296460"/>
+                    <a:gd name="connsiteY3" fmla="*/ 1230999 h 1230999"/>
+                    <a:gd name="connsiteX4" fmla="*/ 0 w 7296460"/>
+                    <a:gd name="connsiteY4" fmla="*/ 0 h 1230999"/>
+                    <a:gd name="connsiteX0" fmla="*/ 144780 w 7296460"/>
+                    <a:gd name="connsiteY0" fmla="*/ 99060 h 1230999"/>
+                    <a:gd name="connsiteX1" fmla="*/ 7296460 w 7296460"/>
+                    <a:gd name="connsiteY1" fmla="*/ 0 h 1230999"/>
+                    <a:gd name="connsiteX2" fmla="*/ 7296460 w 7296460"/>
+                    <a:gd name="connsiteY2" fmla="*/ 1230999 h 1230999"/>
+                    <a:gd name="connsiteX3" fmla="*/ 0 w 7296460"/>
+                    <a:gd name="connsiteY3" fmla="*/ 1230999 h 1230999"/>
+                    <a:gd name="connsiteX4" fmla="*/ 144780 w 7296460"/>
+                    <a:gd name="connsiteY4" fmla="*/ 99060 h 1230999"/>
+                    <a:gd name="connsiteX0" fmla="*/ 144780 w 7347260"/>
+                    <a:gd name="connsiteY0" fmla="*/ 99060 h 1230999"/>
+                    <a:gd name="connsiteX1" fmla="*/ 7296460 w 7347260"/>
+                    <a:gd name="connsiteY1" fmla="*/ 0 h 1230999"/>
+                    <a:gd name="connsiteX2" fmla="*/ 7296460 w 7347260"/>
+                    <a:gd name="connsiteY2" fmla="*/ 1230999 h 1230999"/>
+                    <a:gd name="connsiteX3" fmla="*/ 0 w 7347260"/>
+                    <a:gd name="connsiteY3" fmla="*/ 1230999 h 1230999"/>
+                    <a:gd name="connsiteX4" fmla="*/ 144780 w 7347260"/>
+                    <a:gd name="connsiteY4" fmla="*/ 99060 h 1230999"/>
+                    <a:gd name="connsiteX0" fmla="*/ 144780 w 7347260"/>
+                    <a:gd name="connsiteY0" fmla="*/ 125755 h 1257694"/>
+                    <a:gd name="connsiteX1" fmla="*/ 804220 w 7347260"/>
+                    <a:gd name="connsiteY1" fmla="*/ 0 h 1257694"/>
+                    <a:gd name="connsiteX2" fmla="*/ 7296460 w 7347260"/>
+                    <a:gd name="connsiteY2" fmla="*/ 26695 h 1257694"/>
+                    <a:gd name="connsiteX3" fmla="*/ 7296460 w 7347260"/>
+                    <a:gd name="connsiteY3" fmla="*/ 1257694 h 1257694"/>
+                    <a:gd name="connsiteX4" fmla="*/ 0 w 7347260"/>
+                    <a:gd name="connsiteY4" fmla="*/ 1257694 h 1257694"/>
+                    <a:gd name="connsiteX5" fmla="*/ 144780 w 7347260"/>
+                    <a:gd name="connsiteY5" fmla="*/ 125755 h 1257694"/>
+                    <a:gd name="connsiteX0" fmla="*/ 144780 w 7347260"/>
+                    <a:gd name="connsiteY0" fmla="*/ 144484 h 1276423"/>
+                    <a:gd name="connsiteX1" fmla="*/ 804220 w 7347260"/>
+                    <a:gd name="connsiteY1" fmla="*/ 18729 h 1276423"/>
+                    <a:gd name="connsiteX2" fmla="*/ 7296460 w 7347260"/>
+                    <a:gd name="connsiteY2" fmla="*/ 45424 h 1276423"/>
+                    <a:gd name="connsiteX3" fmla="*/ 7296460 w 7347260"/>
+                    <a:gd name="connsiteY3" fmla="*/ 1276423 h 1276423"/>
+                    <a:gd name="connsiteX4" fmla="*/ 0 w 7347260"/>
+                    <a:gd name="connsiteY4" fmla="*/ 1276423 h 1276423"/>
+                    <a:gd name="connsiteX5" fmla="*/ 144780 w 7347260"/>
+                    <a:gd name="connsiteY5" fmla="*/ 144484 h 1276423"/>
+                    <a:gd name="connsiteX0" fmla="*/ 144780 w 7347260"/>
+                    <a:gd name="connsiteY0" fmla="*/ 194608 h 1326547"/>
+                    <a:gd name="connsiteX1" fmla="*/ 926140 w 7347260"/>
+                    <a:gd name="connsiteY1" fmla="*/ 15513 h 1326547"/>
+                    <a:gd name="connsiteX2" fmla="*/ 7296460 w 7347260"/>
+                    <a:gd name="connsiteY2" fmla="*/ 95548 h 1326547"/>
+                    <a:gd name="connsiteX3" fmla="*/ 7296460 w 7347260"/>
+                    <a:gd name="connsiteY3" fmla="*/ 1326547 h 1326547"/>
+                    <a:gd name="connsiteX4" fmla="*/ 0 w 7347260"/>
+                    <a:gd name="connsiteY4" fmla="*/ 1326547 h 1326547"/>
+                    <a:gd name="connsiteX5" fmla="*/ 144780 w 7347260"/>
+                    <a:gd name="connsiteY5" fmla="*/ 194608 h 1326547"/>
+                    <a:gd name="connsiteX0" fmla="*/ 198120 w 7347260"/>
+                    <a:gd name="connsiteY0" fmla="*/ 223701 h 1325160"/>
+                    <a:gd name="connsiteX1" fmla="*/ 926140 w 7347260"/>
+                    <a:gd name="connsiteY1" fmla="*/ 14126 h 1325160"/>
+                    <a:gd name="connsiteX2" fmla="*/ 7296460 w 7347260"/>
+                    <a:gd name="connsiteY2" fmla="*/ 94161 h 1325160"/>
+                    <a:gd name="connsiteX3" fmla="*/ 7296460 w 7347260"/>
+                    <a:gd name="connsiteY3" fmla="*/ 1325160 h 1325160"/>
+                    <a:gd name="connsiteX4" fmla="*/ 0 w 7347260"/>
+                    <a:gd name="connsiteY4" fmla="*/ 1325160 h 1325160"/>
+                    <a:gd name="connsiteX5" fmla="*/ 198120 w 7347260"/>
+                    <a:gd name="connsiteY5" fmla="*/ 223701 h 1325160"/>
+                    <a:gd name="connsiteX0" fmla="*/ 266700 w 7415840"/>
+                    <a:gd name="connsiteY0" fmla="*/ 223701 h 1325160"/>
+                    <a:gd name="connsiteX1" fmla="*/ 994720 w 7415840"/>
+                    <a:gd name="connsiteY1" fmla="*/ 14126 h 1325160"/>
+                    <a:gd name="connsiteX2" fmla="*/ 7365040 w 7415840"/>
+                    <a:gd name="connsiteY2" fmla="*/ 94161 h 1325160"/>
+                    <a:gd name="connsiteX3" fmla="*/ 7365040 w 7415840"/>
+                    <a:gd name="connsiteY3" fmla="*/ 1325160 h 1325160"/>
+                    <a:gd name="connsiteX4" fmla="*/ 0 w 7415840"/>
+                    <a:gd name="connsiteY4" fmla="*/ 1248960 h 1325160"/>
+                    <a:gd name="connsiteX5" fmla="*/ 266700 w 7415840"/>
+                    <a:gd name="connsiteY5" fmla="*/ 223701 h 1325160"/>
+                    <a:gd name="connsiteX0" fmla="*/ 267095 w 7416235"/>
+                    <a:gd name="connsiteY0" fmla="*/ 223701 h 1325160"/>
+                    <a:gd name="connsiteX1" fmla="*/ 995115 w 7416235"/>
+                    <a:gd name="connsiteY1" fmla="*/ 14126 h 1325160"/>
+                    <a:gd name="connsiteX2" fmla="*/ 7365435 w 7416235"/>
+                    <a:gd name="connsiteY2" fmla="*/ 94161 h 1325160"/>
+                    <a:gd name="connsiteX3" fmla="*/ 7365435 w 7416235"/>
+                    <a:gd name="connsiteY3" fmla="*/ 1325160 h 1325160"/>
+                    <a:gd name="connsiteX4" fmla="*/ 395 w 7416235"/>
+                    <a:gd name="connsiteY4" fmla="*/ 1248960 h 1325160"/>
+                    <a:gd name="connsiteX5" fmla="*/ 267095 w 7416235"/>
+                    <a:gd name="connsiteY5" fmla="*/ 223701 h 1325160"/>
+                    <a:gd name="connsiteX0" fmla="*/ 267095 w 7365435"/>
+                    <a:gd name="connsiteY0" fmla="*/ 223701 h 1325160"/>
+                    <a:gd name="connsiteX1" fmla="*/ 995115 w 7365435"/>
+                    <a:gd name="connsiteY1" fmla="*/ 14126 h 1325160"/>
+                    <a:gd name="connsiteX2" fmla="*/ 7243515 w 7365435"/>
+                    <a:gd name="connsiteY2" fmla="*/ 117021 h 1325160"/>
+                    <a:gd name="connsiteX3" fmla="*/ 7365435 w 7365435"/>
+                    <a:gd name="connsiteY3" fmla="*/ 1325160 h 1325160"/>
+                    <a:gd name="connsiteX4" fmla="*/ 395 w 7365435"/>
+                    <a:gd name="connsiteY4" fmla="*/ 1248960 h 1325160"/>
+                    <a:gd name="connsiteX5" fmla="*/ 267095 w 7365435"/>
+                    <a:gd name="connsiteY5" fmla="*/ 223701 h 1325160"/>
+                    <a:gd name="connsiteX0" fmla="*/ 267095 w 7373071"/>
+                    <a:gd name="connsiteY0" fmla="*/ 223701 h 1325160"/>
+                    <a:gd name="connsiteX1" fmla="*/ 995115 w 7373071"/>
+                    <a:gd name="connsiteY1" fmla="*/ 14126 h 1325160"/>
+                    <a:gd name="connsiteX2" fmla="*/ 7243515 w 7373071"/>
+                    <a:gd name="connsiteY2" fmla="*/ 117021 h 1325160"/>
+                    <a:gd name="connsiteX3" fmla="*/ 7365435 w 7373071"/>
+                    <a:gd name="connsiteY3" fmla="*/ 1325160 h 1325160"/>
+                    <a:gd name="connsiteX4" fmla="*/ 395 w 7373071"/>
+                    <a:gd name="connsiteY4" fmla="*/ 1248960 h 1325160"/>
+                    <a:gd name="connsiteX5" fmla="*/ 267095 w 7373071"/>
+                    <a:gd name="connsiteY5" fmla="*/ 223701 h 1325160"/>
+                    <a:gd name="connsiteX0" fmla="*/ 267095 w 7365435"/>
+                    <a:gd name="connsiteY0" fmla="*/ 223701 h 1325160"/>
+                    <a:gd name="connsiteX1" fmla="*/ 995115 w 7365435"/>
+                    <a:gd name="connsiteY1" fmla="*/ 14126 h 1325160"/>
+                    <a:gd name="connsiteX2" fmla="*/ 7136835 w 7365435"/>
+                    <a:gd name="connsiteY2" fmla="*/ 117021 h 1325160"/>
+                    <a:gd name="connsiteX3" fmla="*/ 7365435 w 7365435"/>
+                    <a:gd name="connsiteY3" fmla="*/ 1325160 h 1325160"/>
+                    <a:gd name="connsiteX4" fmla="*/ 395 w 7365435"/>
+                    <a:gd name="connsiteY4" fmla="*/ 1248960 h 1325160"/>
+                    <a:gd name="connsiteX5" fmla="*/ 267095 w 7365435"/>
+                    <a:gd name="connsiteY5" fmla="*/ 223701 h 1325160"/>
+                    <a:gd name="connsiteX0" fmla="*/ 267095 w 7426395"/>
+                    <a:gd name="connsiteY0" fmla="*/ 223701 h 1348020"/>
+                    <a:gd name="connsiteX1" fmla="*/ 995115 w 7426395"/>
+                    <a:gd name="connsiteY1" fmla="*/ 14126 h 1348020"/>
+                    <a:gd name="connsiteX2" fmla="*/ 7136835 w 7426395"/>
+                    <a:gd name="connsiteY2" fmla="*/ 117021 h 1348020"/>
+                    <a:gd name="connsiteX3" fmla="*/ 7426395 w 7426395"/>
+                    <a:gd name="connsiteY3" fmla="*/ 1348020 h 1348020"/>
+                    <a:gd name="connsiteX4" fmla="*/ 395 w 7426395"/>
+                    <a:gd name="connsiteY4" fmla="*/ 1248960 h 1348020"/>
+                    <a:gd name="connsiteX5" fmla="*/ 267095 w 7426395"/>
+                    <a:gd name="connsiteY5" fmla="*/ 223701 h 1348020"/>
+                    <a:gd name="connsiteX0" fmla="*/ 267095 w 7426395"/>
+                    <a:gd name="connsiteY0" fmla="*/ 223701 h 1348020"/>
+                    <a:gd name="connsiteX1" fmla="*/ 995115 w 7426395"/>
+                    <a:gd name="connsiteY1" fmla="*/ 14126 h 1348020"/>
+                    <a:gd name="connsiteX2" fmla="*/ 7136835 w 7426395"/>
+                    <a:gd name="connsiteY2" fmla="*/ 117021 h 1348020"/>
+                    <a:gd name="connsiteX3" fmla="*/ 7426395 w 7426395"/>
+                    <a:gd name="connsiteY3" fmla="*/ 1348020 h 1348020"/>
+                    <a:gd name="connsiteX4" fmla="*/ 395 w 7426395"/>
+                    <a:gd name="connsiteY4" fmla="*/ 1248960 h 1348020"/>
+                    <a:gd name="connsiteX5" fmla="*/ 267095 w 7426395"/>
+                    <a:gd name="connsiteY5" fmla="*/ 223701 h 1348020"/>
+                  </a:gdLst>
+                  <a:ahLst/>
+                  <a:cxnLst>
+                    <a:cxn ang="0">
+                      <a:pos x="connsiteX0" y="connsiteY0"/>
+                    </a:cxn>
+                    <a:cxn ang="0">
+                      <a:pos x="connsiteX1" y="connsiteY1"/>
+                    </a:cxn>
+                    <a:cxn ang="0">
+                      <a:pos x="connsiteX2" y="connsiteY2"/>
+                    </a:cxn>
+                    <a:cxn ang="0">
+                      <a:pos x="connsiteX3" y="connsiteY3"/>
+                    </a:cxn>
+                    <a:cxn ang="0">
+                      <a:pos x="connsiteX4" y="connsiteY4"/>
+                    </a:cxn>
+                    <a:cxn ang="0">
+                      <a:pos x="connsiteX5" y="connsiteY5"/>
+                    </a:cxn>
+                  </a:cxnLst>
+                  <a:rect l="l" t="t" r="r" b="b"/>
+                  <a:pathLst>
+                    <a:path w="7426395" h="1348020">
+                      <a:moveTo>
+                        <a:pt x="267095" y="223701"/>
+                      </a:moveTo>
+                      <a:cubicBezTo>
+                        <a:pt x="469128" y="219883"/>
+                        <a:pt x="800702" y="-65876"/>
+                        <a:pt x="995115" y="14126"/>
+                      </a:cubicBezTo>
+                      <a:lnTo>
+                        <a:pt x="7136835" y="117021"/>
+                      </a:lnTo>
+                      <a:cubicBezTo>
+                        <a:pt x="7312095" y="603554"/>
+                        <a:pt x="7380675" y="549067"/>
+                        <a:pt x="7426395" y="1348020"/>
+                      </a:cubicBezTo>
+                      <a:lnTo>
+                        <a:pt x="395" y="1248960"/>
+                      </a:lnTo>
+                      <a:cubicBezTo>
+                        <a:pt x="-9765" y="556687"/>
+                        <a:pt x="178195" y="565454"/>
+                        <a:pt x="267095" y="223701"/>
+                      </a:cubicBezTo>
+                      <a:close/>
+                    </a:path>
+                  </a:pathLst>
+                </a:custGeom>
+                <a:gradFill flip="none" rotWithShape="1">
+                  <a:gsLst>
+                    <a:gs pos="70000">
+                      <a:srgbClr val="B3CEFB"/>
+                    </a:gs>
+                    <a:gs pos="23000">
+                      <a:srgbClr val="B3CEFB"/>
+                    </a:gs>
+                    <a:gs pos="0">
+                      <a:srgbClr val="B3CEFB"/>
+                    </a:gs>
+                    <a:gs pos="97000">
+                      <a:srgbClr val="B3CEFB">
+                        <a:alpha val="41000"/>
+                      </a:srgbClr>
+                    </a:gs>
+                  </a:gsLst>
+                  <a:lin ang="5400000" scaled="1"/>
+                  <a:tileRect/>
+                </a:gradFill>
+                <a:ln>
+                  <a:noFill/>
+                </a:ln>
+                <a:effectLst>
+                  <a:softEdge rad="63500"/>
+                </a:effectLst>
+              </p:spPr>
+              <p:txBody>
+                <a:bodyPr spcFirstLastPara="1" wrap="square" lIns="91425" tIns="91425" rIns="91425" bIns="91425" anchor="t" anchorCtr="0">
+                  <a:noAutofit/>
+                </a:bodyPr>
+                <a:lstStyle/>
+                <a:p>
+                  <a:pPr algn="ctr">
+                    <a:lnSpc>
+                      <a:spcPct val="150000"/>
+                    </a:lnSpc>
+                  </a:pPr>
+                  <a:endParaRPr sz="1500" b="1">
+                    <a:solidFill>
+                      <a:schemeClr val="lt2"/>
+                    </a:solidFill>
+                  </a:endParaRPr>
+                </a:p>
+              </p:txBody>
+            </p:sp>
+            <p:sp>
+              <p:nvSpPr>
+                <p:cNvPr id="55" name="Google Shape;55;p13"/>
+                <p:cNvSpPr txBox="1"/>
+                <p:nvPr/>
+              </p:nvSpPr>
+              <p:spPr>
+                <a:xfrm>
+                  <a:off x="1918229" y="-47852"/>
+                  <a:ext cx="6148247" cy="1014911"/>
+                </a:xfrm>
+                <a:prstGeom prst="rect">
+                  <a:avLst/>
+                </a:prstGeom>
+                <a:gradFill flip="none" rotWithShape="1">
+                  <a:gsLst>
+                    <a:gs pos="70000">
+                      <a:srgbClr val="B3CEFB"/>
+                    </a:gs>
+                    <a:gs pos="23000">
+                      <a:srgbClr val="B3CEFB"/>
+                    </a:gs>
+                    <a:gs pos="0">
+                      <a:srgbClr val="B3CEFB"/>
+                    </a:gs>
+                    <a:gs pos="97000">
+                      <a:srgbClr val="B3CEFB">
+                        <a:alpha val="41000"/>
+                      </a:srgbClr>
+                    </a:gs>
+                  </a:gsLst>
+                  <a:lin ang="5400000" scaled="1"/>
+                  <a:tileRect/>
+                </a:gradFill>
+                <a:ln>
+                  <a:noFill/>
+                </a:ln>
+                <a:effectLst>
+                  <a:softEdge rad="63500"/>
+                </a:effectLst>
+              </p:spPr>
+              <p:txBody>
+                <a:bodyPr spcFirstLastPara="1" wrap="square" lIns="91425" tIns="91425" rIns="91425" bIns="91425" anchor="t" anchorCtr="0">
+                  <a:noAutofit/>
+                </a:bodyPr>
+                <a:lstStyle/>
+                <a:p>
+                  <a:pPr lvl="0" algn="ctr"/>
+                  <a:r>
+                    <a:rPr lang="en" sz="2000" b="1" dirty="0">
+                      <a:solidFill>
+                        <a:srgbClr val="FF5050"/>
+                      </a:solidFill>
+                      <a:effectLst>
+                        <a:outerShdw blurRad="50800" dist="38100" dir="5400000" algn="t" rotWithShape="0">
+                          <a:prstClr val="black">
+                            <a:alpha val="40000"/>
+                          </a:prstClr>
+                        </a:outerShdw>
+                      </a:effectLst>
+                      <a:latin typeface="Univers Condensed" panose="020B0506020202050204" pitchFamily="34" charset="0"/>
+                    </a:rPr>
+                    <a:t>EVGEN 2026</a:t>
+                  </a:r>
+                  <a:r>
+                    <a:rPr lang="en" sz="2000" b="1" dirty="0">
+                      <a:solidFill>
+                        <a:srgbClr val="FF5050"/>
+                      </a:solidFill>
+                      <a:effectLst>
+                        <a:innerShdw blurRad="114300">
+                          <a:prstClr val="black"/>
+                        </a:innerShdw>
+                      </a:effectLst>
+                      <a:latin typeface="Univers Condensed" panose="020B0506020202050204" pitchFamily="34" charset="0"/>
+                    </a:rPr>
+                    <a:t>: </a:t>
+                  </a:r>
+                  <a:r>
+                    <a:rPr lang="en" sz="2000" b="1" dirty="0">
+                      <a:solidFill>
+                        <a:srgbClr val="002060"/>
+                      </a:solidFill>
+                      <a:effectLst>
+                        <a:innerShdw blurRad="114300">
+                          <a:prstClr val="black"/>
+                        </a:innerShdw>
+                      </a:effectLst>
+                      <a:latin typeface="Univers Condensed" panose="020B0506020202050204" pitchFamily="34" charset="0"/>
+                    </a:rPr>
+                    <a:t>The 2</a:t>
+                  </a:r>
+                  <a:r>
+                    <a:rPr lang="en" sz="2000" b="1" baseline="30000" dirty="0">
+                      <a:solidFill>
+                        <a:srgbClr val="002060"/>
+                      </a:solidFill>
+                      <a:effectLst>
+                        <a:innerShdw blurRad="114300">
+                          <a:prstClr val="black"/>
+                        </a:innerShdw>
+                      </a:effectLst>
+                      <a:latin typeface="Univers Condensed" panose="020B0506020202050204" pitchFamily="34" charset="0"/>
+                    </a:rPr>
+                    <a:t>nd</a:t>
+                  </a:r>
+                  <a:r>
+                    <a:rPr lang="en" sz="2000" b="1" dirty="0">
+                      <a:solidFill>
+                        <a:srgbClr val="002060"/>
+                      </a:solidFill>
+                      <a:effectLst>
+                        <a:innerShdw blurRad="114300">
+                          <a:prstClr val="black"/>
+                        </a:innerShdw>
+                      </a:effectLst>
+                      <a:latin typeface="Univers Condensed" panose="020B0506020202050204" pitchFamily="34" charset="0"/>
+                    </a:rPr>
+                    <a:t> Workshop on </a:t>
+                  </a:r>
+                </a:p>
+                <a:p>
+                  <a:pPr algn="ctr"/>
+                  <a:r>
+                    <a:rPr lang="en" sz="2000" b="1" dirty="0">
+                      <a:solidFill>
+                        <a:srgbClr val="002060"/>
+                      </a:solidFill>
+                      <a:effectLst>
+                        <a:innerShdw blurRad="114300">
+                          <a:prstClr val="black"/>
+                        </a:innerShdw>
+                      </a:effectLst>
+                      <a:latin typeface="Univers Condensed" panose="020B0506020202050204" pitchFamily="34" charset="0"/>
+                    </a:rPr>
+                    <a:t>“Event-based Vision in the Era of Generative AI”: Transforming Perception and Visual Innovation</a:t>
+                  </a:r>
+                  <a:endParaRPr sz="2000" b="1" dirty="0">
+                    <a:solidFill>
+                      <a:srgbClr val="002060"/>
+                    </a:solidFill>
+                    <a:effectLst>
+                      <a:innerShdw blurRad="114300">
+                        <a:prstClr val="black"/>
+                      </a:innerShdw>
+                    </a:effectLst>
+                    <a:latin typeface="Univers Condensed" panose="020B0506020202050204" pitchFamily="34" charset="0"/>
+                  </a:endParaRPr>
+                </a:p>
+              </p:txBody>
+            </p:sp>
+            <p:pic>
+              <p:nvPicPr>
+                <p:cNvPr id="13" name="Picture 12">
+                  <a:extLst>
+                    <a:ext uri="{FF2B5EF4-FFF2-40B4-BE49-F238E27FC236}">
+                      <a16:creationId xmlns:a16="http://schemas.microsoft.com/office/drawing/2014/main" id="{6C60AAF9-F297-743C-3352-0A3B0426AB50}"/>
+                    </a:ext>
+                  </a:extLst>
+                </p:cNvPr>
+                <p:cNvPicPr>
+                  <a:picLocks noChangeAspect="1"/>
+                </p:cNvPicPr>
+                <p:nvPr/>
+              </p:nvPicPr>
+              <p:blipFill>
+                <a:blip r:embed="rId4"/>
+                <a:srcRect/>
+                <a:stretch/>
+              </p:blipFill>
+              <p:spPr>
+                <a:xfrm>
+                  <a:off x="3981339" y="4508400"/>
+                  <a:ext cx="1868995" cy="572654"/>
+                </a:xfrm>
+                <a:prstGeom prst="rect">
+                  <a:avLst/>
+                </a:prstGeom>
+              </p:spPr>
+            </p:pic>
+            <p:grpSp>
+              <p:nvGrpSpPr>
+                <p:cNvPr id="20" name="Group 19">
+                  <a:extLst>
+                    <a:ext uri="{FF2B5EF4-FFF2-40B4-BE49-F238E27FC236}">
+                      <a16:creationId xmlns:a16="http://schemas.microsoft.com/office/drawing/2014/main" id="{AAE80CEA-FD27-779D-4829-B8644539A4B2}"/>
+                    </a:ext>
+                  </a:extLst>
+                </p:cNvPr>
+                <p:cNvGrpSpPr/>
+                <p:nvPr/>
+              </p:nvGrpSpPr>
+              <p:grpSpPr>
+                <a:xfrm>
+                  <a:off x="982615" y="435281"/>
+                  <a:ext cx="1472997" cy="4666466"/>
+                  <a:chOff x="982615" y="458141"/>
+                  <a:chExt cx="1472997" cy="4666466"/>
+                </a:xfrm>
+              </p:grpSpPr>
+              <p:grpSp>
+                <p:nvGrpSpPr>
+                  <p:cNvPr id="15" name="Group 14">
+                    <a:extLst>
+                      <a:ext uri="{FF2B5EF4-FFF2-40B4-BE49-F238E27FC236}">
+                        <a16:creationId xmlns:a16="http://schemas.microsoft.com/office/drawing/2014/main" id="{1AEBB532-50E4-1676-A661-86951EB1318C}"/>
+                      </a:ext>
+                    </a:extLst>
+                  </p:cNvPr>
+                  <p:cNvGrpSpPr/>
+                  <p:nvPr/>
+                </p:nvGrpSpPr>
+                <p:grpSpPr>
+                  <a:xfrm>
+                    <a:off x="1618627" y="1934054"/>
+                    <a:ext cx="836985" cy="2092227"/>
+                    <a:chOff x="1262508" y="1552164"/>
+                    <a:chExt cx="831072" cy="1807966"/>
+                  </a:xfrm>
+                </p:grpSpPr>
+                <p:sp>
+                  <p:nvSpPr>
+                    <p:cNvPr id="10" name="Rectangle: Rounded Corners 9">
+                      <a:extLst>
+                        <a:ext uri="{FF2B5EF4-FFF2-40B4-BE49-F238E27FC236}">
+                          <a16:creationId xmlns:a16="http://schemas.microsoft.com/office/drawing/2014/main" id="{5AAC981C-CAEF-8B99-4630-1660832D8F59}"/>
+                        </a:ext>
+                      </a:extLst>
+                    </p:cNvPr>
+                    <p:cNvSpPr/>
+                    <p:nvPr/>
+                  </p:nvSpPr>
+                  <p:spPr>
+                    <a:xfrm rot="3331528">
+                      <a:off x="1484948" y="2751499"/>
+                      <a:ext cx="386191" cy="831072"/>
+                    </a:xfrm>
+                    <a:prstGeom prst="roundRect">
+                      <a:avLst>
+                        <a:gd name="adj" fmla="val 50000"/>
+                      </a:avLst>
+                    </a:prstGeom>
+                    <a:solidFill>
+                      <a:schemeClr val="accent5"/>
+                    </a:solidFill>
+                    <a:ln>
+                      <a:noFill/>
+                    </a:ln>
+                  </p:spPr>
+                  <p:style>
+                    <a:lnRef idx="2">
+                      <a:schemeClr val="accent1">
+                        <a:shade val="15000"/>
+                      </a:schemeClr>
+                    </a:lnRef>
+                    <a:fillRef idx="1">
+                      <a:schemeClr val="accent1"/>
+                    </a:fillRef>
+                    <a:effectRef idx="0">
+                      <a:schemeClr val="accent1"/>
+                    </a:effectRef>
+                    <a:fontRef idx="minor">
+                      <a:schemeClr val="lt1"/>
+                    </a:fontRef>
+                  </p:style>
+                  <p:txBody>
+                    <a:bodyPr rtlCol="0" anchor="ctr"/>
+                    <a:lstStyle/>
+                    <a:p>
+                      <a:pPr algn="ctr"/>
+                      <a:endParaRPr lang="en-IN"/>
+                    </a:p>
+                  </p:txBody>
+                </p:sp>
+                <p:sp>
+                  <p:nvSpPr>
+                    <p:cNvPr id="11" name="Rectangle: Rounded Corners 10">
+                      <a:extLst>
+                        <a:ext uri="{FF2B5EF4-FFF2-40B4-BE49-F238E27FC236}">
+                          <a16:creationId xmlns:a16="http://schemas.microsoft.com/office/drawing/2014/main" id="{1DA2ABD9-E1DA-5173-D12E-BBF2CBDBF1F1}"/>
+                        </a:ext>
+                      </a:extLst>
+                    </p:cNvPr>
+                    <p:cNvSpPr/>
+                    <p:nvPr/>
+                  </p:nvSpPr>
+                  <p:spPr>
+                    <a:xfrm>
+                      <a:off x="1745199" y="1552164"/>
+                      <a:ext cx="328686" cy="1614871"/>
+                    </a:xfrm>
+                    <a:prstGeom prst="roundRect">
+                      <a:avLst>
+                        <a:gd name="adj" fmla="val 50000"/>
+                      </a:avLst>
+                    </a:prstGeom>
+                    <a:solidFill>
+                      <a:schemeClr val="accent5"/>
+                    </a:solidFill>
+                    <a:ln>
+                      <a:noFill/>
+                    </a:ln>
+                  </p:spPr>
+                  <p:style>
+                    <a:lnRef idx="2">
+                      <a:schemeClr val="accent1">
+                        <a:shade val="15000"/>
+                      </a:schemeClr>
+                    </a:lnRef>
+                    <a:fillRef idx="1">
+                      <a:schemeClr val="accent1"/>
+                    </a:fillRef>
+                    <a:effectRef idx="0">
+                      <a:schemeClr val="accent1"/>
+                    </a:effectRef>
+                    <a:fontRef idx="minor">
+                      <a:schemeClr val="lt1"/>
+                    </a:fontRef>
+                  </p:style>
+                  <p:txBody>
+                    <a:bodyPr rtlCol="0" anchor="ctr"/>
+                    <a:lstStyle/>
+                    <a:p>
+                      <a:pPr algn="ctr"/>
+                      <a:endParaRPr lang="en-IN"/>
+                    </a:p>
+                  </p:txBody>
+                </p:sp>
+              </p:grpSp>
+              <p:grpSp>
+                <p:nvGrpSpPr>
+                  <p:cNvPr id="14" name="Group 13">
+                    <a:extLst>
+                      <a:ext uri="{FF2B5EF4-FFF2-40B4-BE49-F238E27FC236}">
+                        <a16:creationId xmlns:a16="http://schemas.microsoft.com/office/drawing/2014/main" id="{AB0168B4-B5EC-023E-8795-19F5EED4BCC5}"/>
+                      </a:ext>
+                    </a:extLst>
+                  </p:cNvPr>
+                  <p:cNvGrpSpPr/>
+                  <p:nvPr/>
+                </p:nvGrpSpPr>
+                <p:grpSpPr>
+                  <a:xfrm>
+                    <a:off x="982615" y="793686"/>
+                    <a:ext cx="645393" cy="2126528"/>
+                    <a:chOff x="630990" y="566732"/>
+                    <a:chExt cx="640833" cy="1837607"/>
+                  </a:xfrm>
+                </p:grpSpPr>
+                <p:sp>
+                  <p:nvSpPr>
+                    <p:cNvPr id="8" name="Rectangle: Rounded Corners 7">
+                      <a:extLst>
+                        <a:ext uri="{FF2B5EF4-FFF2-40B4-BE49-F238E27FC236}">
+                          <a16:creationId xmlns:a16="http://schemas.microsoft.com/office/drawing/2014/main" id="{18CEBBEF-72CB-1F82-FA6E-0811583BB7CD}"/>
+                        </a:ext>
+                      </a:extLst>
+                    </p:cNvPr>
+                    <p:cNvSpPr/>
+                    <p:nvPr/>
+                  </p:nvSpPr>
+                  <p:spPr>
+                    <a:xfrm rot="18268472" flipH="1">
+                      <a:off x="789739" y="1922254"/>
+                      <a:ext cx="323336" cy="640833"/>
+                    </a:xfrm>
+                    <a:prstGeom prst="roundRect">
+                      <a:avLst>
+                        <a:gd name="adj" fmla="val 50000"/>
+                      </a:avLst>
+                    </a:prstGeom>
+                    <a:solidFill>
+                      <a:schemeClr val="accent5"/>
+                    </a:solidFill>
+                    <a:ln>
+                      <a:noFill/>
+                    </a:ln>
+                  </p:spPr>
+                  <p:style>
+                    <a:lnRef idx="2">
+                      <a:schemeClr val="accent1">
+                        <a:shade val="15000"/>
+                      </a:schemeClr>
+                    </a:lnRef>
+                    <a:fillRef idx="1">
+                      <a:schemeClr val="accent1"/>
+                    </a:fillRef>
+                    <a:effectRef idx="0">
+                      <a:schemeClr val="accent1"/>
+                    </a:effectRef>
+                    <a:fontRef idx="minor">
+                      <a:schemeClr val="lt1"/>
+                    </a:fontRef>
+                  </p:style>
+                  <p:txBody>
+                    <a:bodyPr rtlCol="0" anchor="ctr"/>
+                    <a:lstStyle/>
+                    <a:p>
+                      <a:pPr algn="ctr"/>
+                      <a:endParaRPr lang="en-IN"/>
+                    </a:p>
+                  </p:txBody>
+                </p:sp>
+                <p:sp>
+                  <p:nvSpPr>
+                    <p:cNvPr id="9" name="Rectangle: Rounded Corners 8">
+                      <a:extLst>
+                        <a:ext uri="{FF2B5EF4-FFF2-40B4-BE49-F238E27FC236}">
+                          <a16:creationId xmlns:a16="http://schemas.microsoft.com/office/drawing/2014/main" id="{DB239E47-75DA-1052-8C46-C244E5E6A4D3}"/>
+                        </a:ext>
+                      </a:extLst>
+                    </p:cNvPr>
+                    <p:cNvSpPr/>
+                    <p:nvPr/>
+                  </p:nvSpPr>
+                  <p:spPr>
+                    <a:xfrm flipH="1">
+                      <a:off x="650524" y="566732"/>
+                      <a:ext cx="301059" cy="1713806"/>
+                    </a:xfrm>
+                    <a:prstGeom prst="roundRect">
+                      <a:avLst>
+                        <a:gd name="adj" fmla="val 50000"/>
+                      </a:avLst>
+                    </a:prstGeom>
+                    <a:solidFill>
+                      <a:schemeClr val="accent5"/>
+                    </a:solidFill>
+                    <a:ln>
+                      <a:noFill/>
+                    </a:ln>
+                  </p:spPr>
+                  <p:style>
+                    <a:lnRef idx="2">
+                      <a:schemeClr val="accent1">
+                        <a:shade val="15000"/>
+                      </a:schemeClr>
+                    </a:lnRef>
+                    <a:fillRef idx="1">
+                      <a:schemeClr val="accent1"/>
+                    </a:fillRef>
+                    <a:effectRef idx="0">
+                      <a:schemeClr val="accent1"/>
+                    </a:effectRef>
+                    <a:fontRef idx="minor">
+                      <a:schemeClr val="lt1"/>
+                    </a:fontRef>
+                  </p:style>
+                  <p:txBody>
+                    <a:bodyPr rtlCol="0" anchor="ctr"/>
+                    <a:lstStyle/>
+                    <a:p>
+                      <a:pPr algn="ctr"/>
+                      <a:endParaRPr lang="en-IN"/>
+                    </a:p>
+                  </p:txBody>
+                </p:sp>
+              </p:grpSp>
+              <p:sp>
+                <p:nvSpPr>
+                  <p:cNvPr id="17" name="Freeform: Shape 16">
+                    <a:extLst>
+                      <a:ext uri="{FF2B5EF4-FFF2-40B4-BE49-F238E27FC236}">
+                        <a16:creationId xmlns:a16="http://schemas.microsoft.com/office/drawing/2014/main" id="{5A13CF75-903E-B806-DFF2-361CD607FADA}"/>
+                      </a:ext>
+                    </a:extLst>
+                  </p:cNvPr>
+                  <p:cNvSpPr/>
+                  <p:nvPr/>
+                </p:nvSpPr>
+                <p:spPr>
+                  <a:xfrm>
+                    <a:off x="1439140" y="458141"/>
+                    <a:ext cx="459416" cy="4666466"/>
+                  </a:xfrm>
+                  <a:custGeom>
+                    <a:avLst/>
+                    <a:gdLst>
+                      <a:gd name="connsiteX0" fmla="*/ 229708 w 459416"/>
+                      <a:gd name="connsiteY0" fmla="*/ 0 h 4666466"/>
+                      <a:gd name="connsiteX1" fmla="*/ 459416 w 459416"/>
+                      <a:gd name="connsiteY1" fmla="*/ 229708 h 4666466"/>
+                      <a:gd name="connsiteX2" fmla="*/ 459415 w 459416"/>
+                      <a:gd name="connsiteY2" fmla="*/ 4666466 h 4666466"/>
+                      <a:gd name="connsiteX3" fmla="*/ 278359 w 459416"/>
+                      <a:gd name="connsiteY3" fmla="*/ 4648214 h 4666466"/>
+                      <a:gd name="connsiteX4" fmla="*/ 96690 w 459416"/>
+                      <a:gd name="connsiteY4" fmla="*/ 4591821 h 4666466"/>
+                      <a:gd name="connsiteX5" fmla="*/ 0 w 459416"/>
+                      <a:gd name="connsiteY5" fmla="*/ 4539339 h 4666466"/>
+                      <a:gd name="connsiteX6" fmla="*/ 0 w 459416"/>
+                      <a:gd name="connsiteY6" fmla="*/ 229708 h 4666466"/>
+                      <a:gd name="connsiteX7" fmla="*/ 229708 w 459416"/>
+                      <a:gd name="connsiteY7" fmla="*/ 0 h 4666466"/>
+                    </a:gdLst>
+                    <a:ahLst/>
+                    <a:cxnLst>
+                      <a:cxn ang="0">
+                        <a:pos x="connsiteX0" y="connsiteY0"/>
+                      </a:cxn>
+                      <a:cxn ang="0">
+                        <a:pos x="connsiteX1" y="connsiteY1"/>
+                      </a:cxn>
+                      <a:cxn ang="0">
+                        <a:pos x="connsiteX2" y="connsiteY2"/>
+                      </a:cxn>
+                      <a:cxn ang="0">
+                        <a:pos x="connsiteX3" y="connsiteY3"/>
+                      </a:cxn>
+                      <a:cxn ang="0">
+                        <a:pos x="connsiteX4" y="connsiteY4"/>
+                      </a:cxn>
+                      <a:cxn ang="0">
+                        <a:pos x="connsiteX5" y="connsiteY5"/>
+                      </a:cxn>
+                      <a:cxn ang="0">
+                        <a:pos x="connsiteX6" y="connsiteY6"/>
+                      </a:cxn>
+                      <a:cxn ang="0">
+                        <a:pos x="connsiteX7" y="connsiteY7"/>
+                      </a:cxn>
+                    </a:cxnLst>
+                    <a:rect l="l" t="t" r="r" b="b"/>
+                    <a:pathLst>
+                      <a:path w="459416" h="4666466">
+                        <a:moveTo>
+                          <a:pt x="229708" y="0"/>
+                        </a:moveTo>
+                        <a:cubicBezTo>
+                          <a:pt x="356572" y="0"/>
+                          <a:pt x="459416" y="102844"/>
+                          <a:pt x="459416" y="229708"/>
+                        </a:cubicBezTo>
+                        <a:lnTo>
+                          <a:pt x="459415" y="4666466"/>
+                        </a:lnTo>
+                        <a:lnTo>
+                          <a:pt x="278359" y="4648214"/>
+                        </a:lnTo>
+                        <a:cubicBezTo>
+                          <a:pt x="215356" y="4635322"/>
+                          <a:pt x="154584" y="4616308"/>
+                          <a:pt x="96690" y="4591821"/>
+                        </a:cubicBezTo>
+                        <a:lnTo>
+                          <a:pt x="0" y="4539339"/>
+                        </a:lnTo>
+                        <a:lnTo>
+                          <a:pt x="0" y="229708"/>
+                        </a:lnTo>
+                        <a:cubicBezTo>
+                          <a:pt x="0" y="102844"/>
+                          <a:pt x="102844" y="0"/>
+                          <a:pt x="229708" y="0"/>
+                        </a:cubicBezTo>
+                        <a:close/>
+                      </a:path>
+                    </a:pathLst>
+                  </a:custGeom>
+                  <a:solidFill>
+                    <a:srgbClr val="0097A7"/>
+                  </a:solidFill>
+                  <a:ln>
+                    <a:noFill/>
+                  </a:ln>
+                </p:spPr>
+                <p:style>
+                  <a:lnRef idx="2">
+                    <a:schemeClr val="accent1">
+                      <a:shade val="15000"/>
+                    </a:schemeClr>
+                  </a:lnRef>
+                  <a:fillRef idx="1">
+                    <a:schemeClr val="accent1"/>
+                  </a:fillRef>
+                  <a:effectRef idx="0">
+                    <a:schemeClr val="accent1"/>
+                  </a:effectRef>
+                  <a:fontRef idx="minor">
+                    <a:schemeClr val="lt1"/>
+                  </a:fontRef>
+                </p:style>
+                <p:txBody>
+                  <a:bodyPr wrap="square" rtlCol="0" anchor="ctr">
+                    <a:noAutofit/>
+                  </a:bodyPr>
+                  <a:lstStyle/>
+                  <a:p>
+                    <a:pPr algn="ctr"/>
+                    <a:endParaRPr lang="en-IN"/>
+                  </a:p>
+                </p:txBody>
+              </p:sp>
+            </p:grpSp>
+            <p:sp>
+              <p:nvSpPr>
+                <p:cNvPr id="4" name="Rectangle: Rounded Corners 3">
+                  <a:extLst>
+                    <a:ext uri="{FF2B5EF4-FFF2-40B4-BE49-F238E27FC236}">
+                      <a16:creationId xmlns:a16="http://schemas.microsoft.com/office/drawing/2014/main" id="{4351F720-DE87-0EE9-67E9-93EA3A18998A}"/>
+                    </a:ext>
+                  </a:extLst>
+                </p:cNvPr>
+                <p:cNvSpPr/>
+                <p:nvPr/>
+              </p:nvSpPr>
+              <p:spPr>
+                <a:xfrm>
+                  <a:off x="979428" y="-86289"/>
+                  <a:ext cx="7682296" cy="5229789"/>
+                </a:xfrm>
+                <a:prstGeom prst="roundRect">
+                  <a:avLst>
+                    <a:gd name="adj" fmla="val 20310"/>
+                  </a:avLst>
+                </a:prstGeom>
+                <a:noFill/>
+                <a:ln w="57150">
+                  <a:solidFill>
+                    <a:srgbClr val="0F75BC"/>
+                  </a:solidFill>
+                </a:ln>
+                <a:effectLst>
+                  <a:outerShdw blurRad="50800" dist="38100" dir="13500000" algn="br" rotWithShape="0">
+                    <a:prstClr val="black">
+                      <a:alpha val="40000"/>
+                    </a:prstClr>
+                  </a:outerShdw>
+                </a:effectLst>
+              </p:spPr>
+              <p:style>
+                <a:lnRef idx="2">
+                  <a:schemeClr val="accent1">
+                    <a:shade val="15000"/>
+                  </a:schemeClr>
+                </a:lnRef>
+                <a:fillRef idx="1">
+                  <a:schemeClr val="accent1"/>
+                </a:fillRef>
+                <a:effectRef idx="0">
+                  <a:schemeClr val="accent1"/>
+                </a:effectRef>
+                <a:fontRef idx="minor">
+                  <a:schemeClr val="lt1"/>
+                </a:fontRef>
+              </p:style>
+              <p:txBody>
+                <a:bodyPr rtlCol="0" anchor="ctr"/>
+                <a:lstStyle/>
+                <a:p>
+                  <a:pPr algn="ctr"/>
+                  <a:endParaRPr lang="en-IN"/>
+                </a:p>
+              </p:txBody>
+            </p:sp>
           </p:grpSp>
+        </p:grpSp>
+        <p:pic>
+          <p:nvPicPr>
+            <p:cNvPr id="23" name="Picture 22">
+              <a:extLst>
+                <a:ext uri="{FF2B5EF4-FFF2-40B4-BE49-F238E27FC236}">
+                  <a16:creationId xmlns:a16="http://schemas.microsoft.com/office/drawing/2014/main" id="{0090962F-5140-EBE6-965C-8057C14482ED}"/>
+                </a:ext>
+              </a:extLst>
+            </p:cNvPr>
+            <p:cNvPicPr>
+              <a:picLocks noChangeAspect="1"/>
+            </p:cNvPicPr>
+            <p:nvPr/>
+          </p:nvPicPr>
+          <p:blipFill>
+            <a:blip r:embed="rId5">
+              <a:clrChange>
+                <a:clrFrom>
+                  <a:srgbClr val="FFFFFF"/>
+                </a:clrFrom>
+                <a:clrTo>
+                  <a:srgbClr val="FFFFFF">
+                    <a:alpha val="0"/>
+                  </a:srgbClr>
+                </a:clrTo>
+              </a:clrChange>
+            </a:blip>
+            <a:stretch>
+              <a:fillRect/>
+            </a:stretch>
+          </p:blipFill>
+          <p:spPr>
+            <a:xfrm>
+              <a:off x="7317344" y="535941"/>
+              <a:ext cx="710744" cy="722928"/>
+            </a:xfrm>
+            <a:prstGeom prst="rect">
+              <a:avLst/>
+            </a:prstGeom>
+          </p:spPr>
+        </p:pic>
+        <p:sp>
+          <p:nvSpPr>
+            <p:cNvPr id="24" name="TextBox 23">
+              <a:extLst>
+                <a:ext uri="{FF2B5EF4-FFF2-40B4-BE49-F238E27FC236}">
+                  <a16:creationId xmlns:a16="http://schemas.microsoft.com/office/drawing/2014/main" id="{5E92B06D-75CA-DB59-35CE-0AAAED231A94}"/>
+                </a:ext>
+              </a:extLst>
+            </p:cNvPr>
+            <p:cNvSpPr txBox="1"/>
+            <p:nvPr/>
+          </p:nvSpPr>
+          <p:spPr>
+            <a:xfrm>
+              <a:off x="4397600" y="1287946"/>
+              <a:ext cx="1177421" cy="400110"/>
+            </a:xfrm>
+            <a:prstGeom prst="rect">
+              <a:avLst/>
+            </a:prstGeom>
+            <a:noFill/>
+          </p:spPr>
+          <p:txBody>
+            <a:bodyPr wrap="square">
+              <a:spAutoFit/>
+            </a:bodyPr>
+            <a:lstStyle/>
+            <a:p>
+              <a:pPr algn="ctr"/>
+              <a:r>
+                <a:rPr lang="en-US" sz="2000" b="1" dirty="0">
+                  <a:solidFill>
+                    <a:srgbClr val="7030A0"/>
+                  </a:solidFill>
+                  <a:effectLst>
+                    <a:outerShdw blurRad="50800" dist="38100" dir="5400000" algn="t" rotWithShape="0">
+                      <a:prstClr val="black">
+                        <a:alpha val="40000"/>
+                      </a:prstClr>
+                    </a:outerShdw>
+                  </a:effectLst>
+                  <a:latin typeface="Univers Condensed" panose="020B0506020202050204" pitchFamily="34" charset="0"/>
+                </a:rPr>
+                <a:t>Speakers</a:t>
+              </a:r>
+            </a:p>
+          </p:txBody>
+        </p:sp>
+        <p:grpSp>
+          <p:nvGrpSpPr>
+            <p:cNvPr id="31" name="Group 30">
+              <a:extLst>
+                <a:ext uri="{FF2B5EF4-FFF2-40B4-BE49-F238E27FC236}">
+                  <a16:creationId xmlns:a16="http://schemas.microsoft.com/office/drawing/2014/main" id="{9B62B4C7-752D-E91B-B347-EA8836CF1763}"/>
+                </a:ext>
+              </a:extLst>
+            </p:cNvPr>
+            <p:cNvGrpSpPr/>
+            <p:nvPr/>
+          </p:nvGrpSpPr>
+          <p:grpSpPr>
+            <a:xfrm>
+              <a:off x="4174603" y="1686408"/>
+              <a:ext cx="1695590" cy="1537635"/>
+              <a:chOff x="3724205" y="1686408"/>
+              <a:chExt cx="1695590" cy="1537635"/>
+            </a:xfrm>
+          </p:grpSpPr>
           <p:sp>
             <p:nvSpPr>
-              <p:cNvPr id="4" name="Rectangle: Rounded Corners 3">
+              <p:cNvPr id="12" name="Flowchart: Connector 11">
                 <a:extLst>
                   <a:ext uri="{FF2B5EF4-FFF2-40B4-BE49-F238E27FC236}">
-                    <a16:creationId xmlns:a16="http://schemas.microsoft.com/office/drawing/2014/main" id="{4351F720-DE87-0EE9-67E9-93EA3A18998A}"/>
+                    <a16:creationId xmlns:a16="http://schemas.microsoft.com/office/drawing/2014/main" id="{BFD52ED9-C00B-26FE-1747-D35FC31A07C5}"/>
                   </a:ext>
                 </a:extLst>
               </p:cNvPr>
@@ -6387,22 +6568,21 @@
             </p:nvSpPr>
             <p:spPr>
               <a:xfrm>
-                <a:off x="979428" y="-86289"/>
-                <a:ext cx="7682296" cy="5229789"/>
+                <a:off x="4071230" y="1686408"/>
+                <a:ext cx="981389" cy="934107"/>
               </a:xfrm>
-              <a:prstGeom prst="roundRect">
-                <a:avLst>
-                  <a:gd name="adj" fmla="val 20310"/>
-                </a:avLst>
+              <a:prstGeom prst="flowChartConnector">
+                <a:avLst/>
               </a:prstGeom>
-              <a:noFill/>
-              <a:ln w="57150">
-                <a:solidFill>
-                  <a:srgbClr val="0F75BC"/>
-                </a:solidFill>
-              </a:ln>
+              <a:blipFill>
+                <a:blip r:embed="rId6"/>
+                <a:stretch>
+                  <a:fillRect/>
+                </a:stretch>
+              </a:blipFill>
+              <a:ln w="6350"/>
               <a:effectLst>
-                <a:outerShdw blurRad="50800" dist="38100" dir="13500000" algn="br" rotWithShape="0">
+                <a:outerShdw blurRad="63500" sx="102000" sy="102000" algn="ctr" rotWithShape="0">
                   <a:prstClr val="black">
                     <a:alpha val="40000"/>
                   </a:prstClr>
@@ -6430,254 +6610,1538 @@
               <a:lstStyle/>
               <a:p>
                 <a:pPr algn="ctr"/>
-                <a:endParaRPr lang="en-IN"/>
+                <a:endParaRPr lang="en-US"/>
+              </a:p>
+            </p:txBody>
+          </p:sp>
+          <p:sp>
+            <p:nvSpPr>
+              <p:cNvPr id="18" name="TextBox 17">
+                <a:extLst>
+                  <a:ext uri="{FF2B5EF4-FFF2-40B4-BE49-F238E27FC236}">
+                    <a16:creationId xmlns:a16="http://schemas.microsoft.com/office/drawing/2014/main" id="{E991CE1F-A022-F62C-94F0-66B621E3ECCD}"/>
+                  </a:ext>
+                </a:extLst>
+              </p:cNvPr>
+              <p:cNvSpPr txBox="1"/>
+              <p:nvPr/>
+            </p:nvSpPr>
+            <p:spPr>
+              <a:xfrm>
+                <a:off x="3724205" y="2570018"/>
+                <a:ext cx="1695590" cy="654025"/>
+              </a:xfrm>
+              <a:prstGeom prst="rect">
+                <a:avLst/>
+              </a:prstGeom>
+              <a:noFill/>
+            </p:spPr>
+            <p:txBody>
+              <a:bodyPr wrap="square">
+                <a:spAutoFit/>
+              </a:bodyPr>
+              <a:lstStyle/>
+              <a:p>
+                <a:pPr algn="ctr">
+                  <a:lnSpc>
+                    <a:spcPts val="1500"/>
+                  </a:lnSpc>
+                </a:pPr>
+                <a:r>
+                  <a:rPr lang="en-US" sz="1200" b="1" dirty="0">
+                    <a:solidFill>
+                      <a:srgbClr val="002060"/>
+                    </a:solidFill>
+                    <a:effectLst>
+                      <a:innerShdw blurRad="114300">
+                        <a:prstClr val="black"/>
+                      </a:innerShdw>
+                    </a:effectLst>
+                    <a:latin typeface="Univers Condensed" panose="020B0506020202050204" pitchFamily="34" charset="0"/>
+                    <a:hlinkClick r:id="rId7">
+                      <a:extLst>
+                        <a:ext uri="{A12FA001-AC4F-418D-AE19-62706E023703}">
+                          <ahyp:hlinkClr xmlns:ahyp="http://schemas.microsoft.com/office/drawing/2018/hyperlinkcolor" val="tx"/>
+                        </a:ext>
+                      </a:extLst>
+                    </a:hlinkClick>
+                  </a:rPr>
+                  <a:t>Tejas Gokhale</a:t>
+                </a:r>
+                <a:endParaRPr lang="en-US" sz="1200" b="1" dirty="0">
+                  <a:solidFill>
+                    <a:srgbClr val="002060"/>
+                  </a:solidFill>
+                  <a:effectLst>
+                    <a:innerShdw blurRad="114300">
+                      <a:prstClr val="black"/>
+                    </a:innerShdw>
+                  </a:effectLst>
+                  <a:latin typeface="Univers Condensed" panose="020B0506020202050204" pitchFamily="34" charset="0"/>
+                </a:endParaRPr>
+              </a:p>
+              <a:p>
+                <a:pPr algn="ctr">
+                  <a:buNone/>
+                </a:pPr>
+                <a:r>
+                  <a:rPr lang="en-US" sz="1200" b="1" dirty="0">
+                    <a:solidFill>
+                      <a:schemeClr val="tx1"/>
+                    </a:solidFill>
+                    <a:effectLst>
+                      <a:innerShdw blurRad="114300">
+                        <a:prstClr val="black"/>
+                      </a:innerShdw>
+                    </a:effectLst>
+                    <a:latin typeface="Univers Condensed" panose="020B0506020202050204" pitchFamily="34" charset="0"/>
+                  </a:rPr>
+                  <a:t>University of Maryland, Baltimore County</a:t>
+                </a:r>
+              </a:p>
+            </p:txBody>
+          </p:sp>
+        </p:grpSp>
+        <p:sp>
+          <p:nvSpPr>
+            <p:cNvPr id="27" name="TextBox 26">
+              <a:extLst>
+                <a:ext uri="{FF2B5EF4-FFF2-40B4-BE49-F238E27FC236}">
+                  <a16:creationId xmlns:a16="http://schemas.microsoft.com/office/drawing/2014/main" id="{46027878-7284-B5F4-3187-0D1B49AB3C37}"/>
+                </a:ext>
+              </a:extLst>
+            </p:cNvPr>
+            <p:cNvSpPr txBox="1"/>
+            <p:nvPr/>
+          </p:nvSpPr>
+          <p:spPr>
+            <a:xfrm>
+              <a:off x="1582808" y="4489376"/>
+              <a:ext cx="3077280" cy="369332"/>
+            </a:xfrm>
+            <a:prstGeom prst="rect">
+              <a:avLst/>
+            </a:prstGeom>
+            <a:noFill/>
+          </p:spPr>
+          <p:txBody>
+            <a:bodyPr wrap="square">
+              <a:spAutoFit/>
+            </a:bodyPr>
+            <a:lstStyle/>
+            <a:p>
+              <a:pPr algn="ctr"/>
+              <a:r>
+                <a:rPr lang="en-US" sz="1800" b="1" dirty="0">
+                  <a:solidFill>
+                    <a:srgbClr val="7030A0"/>
+                  </a:solidFill>
+                  <a:effectLst>
+                    <a:outerShdw blurRad="50800" dist="38100" dir="5400000" algn="t" rotWithShape="0">
+                      <a:prstClr val="black">
+                        <a:alpha val="40000"/>
+                      </a:prstClr>
+                    </a:outerShdw>
+                  </a:effectLst>
+                  <a:latin typeface="Univers Condensed" panose="020B0506020202050204" pitchFamily="34" charset="0"/>
+                </a:rPr>
+                <a:t>Time: </a:t>
+              </a:r>
+              <a:r>
+                <a:rPr lang="en-US" sz="1800" b="1" dirty="0">
+                  <a:solidFill>
+                    <a:schemeClr val="tx1"/>
+                  </a:solidFill>
+                  <a:effectLst>
+                    <a:outerShdw blurRad="50800" dist="38100" dir="5400000" algn="t" rotWithShape="0">
+                      <a:prstClr val="black">
+                        <a:alpha val="40000"/>
+                      </a:prstClr>
+                    </a:outerShdw>
+                  </a:effectLst>
+                  <a:latin typeface="Univers Condensed" panose="020B0506020202050204" pitchFamily="34" charset="0"/>
+                </a:rPr>
+                <a:t>March 6, </a:t>
+              </a:r>
+              <a:r>
+                <a:rPr lang="en-US" sz="1800" b="1" dirty="0">
+                  <a:solidFill>
+                    <a:schemeClr val="tx1"/>
+                  </a:solidFill>
+                  <a:effectLst>
+                    <a:innerShdw blurRad="114300">
+                      <a:prstClr val="black"/>
+                    </a:innerShdw>
+                  </a:effectLst>
+                  <a:latin typeface="Univers Condensed" panose="020B0506020202050204" pitchFamily="34" charset="0"/>
+                </a:rPr>
+                <a:t>1 PM – 5:30 PM</a:t>
+              </a:r>
+            </a:p>
+          </p:txBody>
+        </p:sp>
+        <p:sp>
+          <p:nvSpPr>
+            <p:cNvPr id="29" name="TextBox 28">
+              <a:extLst>
+                <a:ext uri="{FF2B5EF4-FFF2-40B4-BE49-F238E27FC236}">
+                  <a16:creationId xmlns:a16="http://schemas.microsoft.com/office/drawing/2014/main" id="{F5CAB185-98F1-3E33-C389-491CE2B4B683}"/>
+                </a:ext>
+              </a:extLst>
+            </p:cNvPr>
+            <p:cNvSpPr txBox="1"/>
+            <p:nvPr/>
+          </p:nvSpPr>
+          <p:spPr>
+            <a:xfrm>
+              <a:off x="5008586" y="4469351"/>
+              <a:ext cx="3091600" cy="369332"/>
+            </a:xfrm>
+            <a:prstGeom prst="rect">
+              <a:avLst/>
+            </a:prstGeom>
+            <a:noFill/>
+          </p:spPr>
+          <p:txBody>
+            <a:bodyPr wrap="square">
+              <a:spAutoFit/>
+            </a:bodyPr>
+            <a:lstStyle/>
+            <a:p>
+              <a:pPr algn="ctr"/>
+              <a:r>
+                <a:rPr lang="en-US" sz="1800" b="1" dirty="0">
+                  <a:solidFill>
+                    <a:srgbClr val="7030A0"/>
+                  </a:solidFill>
+                  <a:effectLst>
+                    <a:outerShdw blurRad="50800" dist="38100" dir="5400000" algn="t" rotWithShape="0">
+                      <a:prstClr val="black">
+                        <a:alpha val="40000"/>
+                      </a:prstClr>
+                    </a:outerShdw>
+                  </a:effectLst>
+                  <a:latin typeface="Univers Condensed" panose="020B0506020202050204" pitchFamily="34" charset="0"/>
+                </a:rPr>
+                <a:t>Location: </a:t>
+              </a:r>
+              <a:r>
+                <a:rPr lang="en-US" sz="1800" b="1" dirty="0">
+                  <a:solidFill>
+                    <a:schemeClr val="tx1"/>
+                  </a:solidFill>
+                  <a:effectLst>
+                    <a:innerShdw blurRad="114300">
+                      <a:prstClr val="black"/>
+                    </a:innerShdw>
+                  </a:effectLst>
+                  <a:latin typeface="Univers Condensed" panose="020B0506020202050204" pitchFamily="34" charset="0"/>
+                </a:rPr>
+                <a:t>Arizona Ballroom 7</a:t>
+              </a:r>
+              <a:endParaRPr lang="en-US" sz="1800" dirty="0"/>
+            </a:p>
+          </p:txBody>
+        </p:sp>
+        <p:grpSp>
+          <p:nvGrpSpPr>
+            <p:cNvPr id="32" name="Group 31">
+              <a:extLst>
+                <a:ext uri="{FF2B5EF4-FFF2-40B4-BE49-F238E27FC236}">
+                  <a16:creationId xmlns:a16="http://schemas.microsoft.com/office/drawing/2014/main" id="{393C727A-1D2C-610F-D0C1-A78D4D11B6FE}"/>
+                </a:ext>
+              </a:extLst>
+            </p:cNvPr>
+            <p:cNvGrpSpPr/>
+            <p:nvPr/>
+          </p:nvGrpSpPr>
+          <p:grpSpPr>
+            <a:xfrm>
+              <a:off x="6169377" y="1699752"/>
+              <a:ext cx="1695590" cy="1542188"/>
+              <a:chOff x="3724205" y="1686408"/>
+              <a:chExt cx="1695590" cy="1542188"/>
+            </a:xfrm>
+          </p:grpSpPr>
+          <p:sp>
+            <p:nvSpPr>
+              <p:cNvPr id="33" name="Flowchart: Connector 32">
+                <a:extLst>
+                  <a:ext uri="{FF2B5EF4-FFF2-40B4-BE49-F238E27FC236}">
+                    <a16:creationId xmlns:a16="http://schemas.microsoft.com/office/drawing/2014/main" id="{3AA52F9B-AD70-A9D9-4B0F-00BC46A1D289}"/>
+                  </a:ext>
+                </a:extLst>
+              </p:cNvPr>
+              <p:cNvSpPr/>
+              <p:nvPr/>
+            </p:nvSpPr>
+            <p:spPr>
+              <a:xfrm>
+                <a:off x="4071230" y="1686408"/>
+                <a:ext cx="981389" cy="934107"/>
+              </a:xfrm>
+              <a:prstGeom prst="flowChartConnector">
+                <a:avLst/>
+              </a:prstGeom>
+              <a:blipFill>
+                <a:blip r:embed="rId8"/>
+                <a:stretch>
+                  <a:fillRect/>
+                </a:stretch>
+              </a:blipFill>
+              <a:ln w="6350"/>
+              <a:effectLst>
+                <a:outerShdw blurRad="63500" sx="102000" sy="102000" algn="ctr" rotWithShape="0">
+                  <a:prstClr val="black">
+                    <a:alpha val="40000"/>
+                  </a:prstClr>
+                </a:outerShdw>
+              </a:effectLst>
+            </p:spPr>
+            <p:style>
+              <a:lnRef idx="2">
+                <a:schemeClr val="accent1">
+                  <a:shade val="15000"/>
+                </a:schemeClr>
+              </a:lnRef>
+              <a:fillRef idx="1">
+                <a:schemeClr val="accent1"/>
+              </a:fillRef>
+              <a:effectRef idx="0">
+                <a:schemeClr val="accent1"/>
+              </a:effectRef>
+              <a:fontRef idx="minor">
+                <a:schemeClr val="lt1"/>
+              </a:fontRef>
+            </p:style>
+            <p:txBody>
+              <a:bodyPr rtlCol="0" anchor="ctr"/>
+              <a:lstStyle/>
+              <a:p>
+                <a:pPr algn="ctr"/>
+                <a:endParaRPr lang="en-US"/>
+              </a:p>
+            </p:txBody>
+          </p:sp>
+          <p:sp>
+            <p:nvSpPr>
+              <p:cNvPr id="34" name="TextBox 33">
+                <a:extLst>
+                  <a:ext uri="{FF2B5EF4-FFF2-40B4-BE49-F238E27FC236}">
+                    <a16:creationId xmlns:a16="http://schemas.microsoft.com/office/drawing/2014/main" id="{C88BCC1A-03F7-2E43-AC23-C91E877A3EA0}"/>
+                  </a:ext>
+                </a:extLst>
+              </p:cNvPr>
+              <p:cNvSpPr txBox="1"/>
+              <p:nvPr/>
+            </p:nvSpPr>
+            <p:spPr>
+              <a:xfrm>
+                <a:off x="3724205" y="2570018"/>
+                <a:ext cx="1695590" cy="658578"/>
+              </a:xfrm>
+              <a:prstGeom prst="rect">
+                <a:avLst/>
+              </a:prstGeom>
+              <a:noFill/>
+            </p:spPr>
+            <p:txBody>
+              <a:bodyPr wrap="square">
+                <a:spAutoFit/>
+              </a:bodyPr>
+              <a:lstStyle/>
+              <a:p>
+                <a:pPr algn="ctr">
+                  <a:lnSpc>
+                    <a:spcPts val="1500"/>
+                  </a:lnSpc>
+                </a:pPr>
+                <a:r>
+                  <a:rPr lang="en-US" sz="1200" b="1" u="sng" dirty="0">
+                    <a:solidFill>
+                      <a:srgbClr val="002060"/>
+                    </a:solidFill>
+                    <a:effectLst>
+                      <a:innerShdw blurRad="114300">
+                        <a:prstClr val="black"/>
+                      </a:innerShdw>
+                    </a:effectLst>
+                    <a:latin typeface="Univers Condensed" panose="020B0506020202050204" pitchFamily="34" charset="0"/>
+                  </a:rPr>
+                  <a:t>Nitin Sanket</a:t>
+                </a:r>
+              </a:p>
+              <a:p>
+                <a:pPr algn="ctr">
+                  <a:lnSpc>
+                    <a:spcPts val="1500"/>
+                  </a:lnSpc>
+                </a:pPr>
+                <a:r>
+                  <a:rPr lang="en-US" sz="1200" b="1" dirty="0">
+                    <a:solidFill>
+                      <a:schemeClr val="tx1"/>
+                    </a:solidFill>
+                    <a:effectLst>
+                      <a:innerShdw blurRad="114300">
+                        <a:prstClr val="black"/>
+                      </a:innerShdw>
+                    </a:effectLst>
+                    <a:latin typeface="Univers Condensed" panose="020B0506020202050204" pitchFamily="34" charset="0"/>
+                  </a:rPr>
+                  <a:t>Worcester Polytechnic Institute</a:t>
+                </a:r>
+              </a:p>
+            </p:txBody>
+          </p:sp>
+        </p:grpSp>
+        <p:grpSp>
+          <p:nvGrpSpPr>
+            <p:cNvPr id="38" name="Group 37">
+              <a:extLst>
+                <a:ext uri="{FF2B5EF4-FFF2-40B4-BE49-F238E27FC236}">
+                  <a16:creationId xmlns:a16="http://schemas.microsoft.com/office/drawing/2014/main" id="{98DACAB2-BA3B-6B92-2926-E54F7BEFCBB1}"/>
+                </a:ext>
+              </a:extLst>
+            </p:cNvPr>
+            <p:cNvGrpSpPr/>
+            <p:nvPr/>
+          </p:nvGrpSpPr>
+          <p:grpSpPr>
+            <a:xfrm>
+              <a:off x="2154318" y="1686408"/>
+              <a:ext cx="1695590" cy="1542188"/>
+              <a:chOff x="3724205" y="1686408"/>
+              <a:chExt cx="1695590" cy="1542188"/>
+            </a:xfrm>
+          </p:grpSpPr>
+          <p:sp>
+            <p:nvSpPr>
+              <p:cNvPr id="39" name="Flowchart: Connector 38">
+                <a:extLst>
+                  <a:ext uri="{FF2B5EF4-FFF2-40B4-BE49-F238E27FC236}">
+                    <a16:creationId xmlns:a16="http://schemas.microsoft.com/office/drawing/2014/main" id="{E27E2045-EDD8-77E1-C3AE-EB0D14A8073F}"/>
+                  </a:ext>
+                </a:extLst>
+              </p:cNvPr>
+              <p:cNvSpPr/>
+              <p:nvPr/>
+            </p:nvSpPr>
+            <p:spPr>
+              <a:xfrm>
+                <a:off x="4071230" y="1686408"/>
+                <a:ext cx="981389" cy="934107"/>
+              </a:xfrm>
+              <a:prstGeom prst="flowChartConnector">
+                <a:avLst/>
+              </a:prstGeom>
+              <a:blipFill>
+                <a:blip r:embed="rId9"/>
+                <a:stretch>
+                  <a:fillRect/>
+                </a:stretch>
+              </a:blipFill>
+              <a:ln w="6350"/>
+              <a:effectLst>
+                <a:outerShdw blurRad="63500" sx="102000" sy="102000" algn="ctr" rotWithShape="0">
+                  <a:prstClr val="black">
+                    <a:alpha val="40000"/>
+                  </a:prstClr>
+                </a:outerShdw>
+              </a:effectLst>
+            </p:spPr>
+            <p:style>
+              <a:lnRef idx="2">
+                <a:schemeClr val="accent1">
+                  <a:shade val="15000"/>
+                </a:schemeClr>
+              </a:lnRef>
+              <a:fillRef idx="1">
+                <a:schemeClr val="accent1"/>
+              </a:fillRef>
+              <a:effectRef idx="0">
+                <a:schemeClr val="accent1"/>
+              </a:effectRef>
+              <a:fontRef idx="minor">
+                <a:schemeClr val="lt1"/>
+              </a:fontRef>
+            </p:style>
+            <p:txBody>
+              <a:bodyPr rtlCol="0" anchor="ctr"/>
+              <a:lstStyle/>
+              <a:p>
+                <a:pPr algn="ctr"/>
+                <a:endParaRPr lang="en-US"/>
+              </a:p>
+            </p:txBody>
+          </p:sp>
+          <p:sp>
+            <p:nvSpPr>
+              <p:cNvPr id="40" name="TextBox 39">
+                <a:extLst>
+                  <a:ext uri="{FF2B5EF4-FFF2-40B4-BE49-F238E27FC236}">
+                    <a16:creationId xmlns:a16="http://schemas.microsoft.com/office/drawing/2014/main" id="{2D528653-D289-0A59-1DB8-10ADFBB899CC}"/>
+                  </a:ext>
+                </a:extLst>
+              </p:cNvPr>
+              <p:cNvSpPr txBox="1"/>
+              <p:nvPr/>
+            </p:nvSpPr>
+            <p:spPr>
+              <a:xfrm>
+                <a:off x="3724205" y="2570018"/>
+                <a:ext cx="1695590" cy="658578"/>
+              </a:xfrm>
+              <a:prstGeom prst="rect">
+                <a:avLst/>
+              </a:prstGeom>
+              <a:noFill/>
+            </p:spPr>
+            <p:txBody>
+              <a:bodyPr wrap="square">
+                <a:spAutoFit/>
+              </a:bodyPr>
+              <a:lstStyle/>
+              <a:p>
+                <a:pPr algn="ctr">
+                  <a:lnSpc>
+                    <a:spcPts val="1500"/>
+                  </a:lnSpc>
+                </a:pPr>
+                <a:r>
+                  <a:rPr lang="en-US" sz="1200" b="1" u="sng" dirty="0">
+                    <a:solidFill>
+                      <a:srgbClr val="002060"/>
+                    </a:solidFill>
+                    <a:effectLst>
+                      <a:innerShdw blurRad="114300">
+                        <a:prstClr val="black"/>
+                      </a:innerShdw>
+                    </a:effectLst>
+                    <a:latin typeface="Univers Condensed" panose="020B0506020202050204" pitchFamily="34" charset="0"/>
+                  </a:rPr>
+                  <a:t>William Beksi</a:t>
+                </a:r>
+              </a:p>
+              <a:p>
+                <a:pPr algn="ctr">
+                  <a:lnSpc>
+                    <a:spcPts val="1500"/>
+                  </a:lnSpc>
+                </a:pPr>
+                <a:r>
+                  <a:rPr lang="en-US" sz="1200" b="1" dirty="0">
+                    <a:solidFill>
+                      <a:schemeClr val="tx1"/>
+                    </a:solidFill>
+                    <a:effectLst>
+                      <a:innerShdw blurRad="114300">
+                        <a:prstClr val="black"/>
+                      </a:innerShdw>
+                    </a:effectLst>
+                    <a:latin typeface="Univers Condensed" panose="020B0506020202050204" pitchFamily="34" charset="0"/>
+                  </a:rPr>
+                  <a:t>University of Texas at Arlington</a:t>
+                </a:r>
+              </a:p>
+            </p:txBody>
+          </p:sp>
+        </p:grpSp>
+        <p:sp>
+          <p:nvSpPr>
+            <p:cNvPr id="41" name="TextBox 40">
+              <a:extLst>
+                <a:ext uri="{FF2B5EF4-FFF2-40B4-BE49-F238E27FC236}">
+                  <a16:creationId xmlns:a16="http://schemas.microsoft.com/office/drawing/2014/main" id="{FD8CA534-0A57-79F5-F844-BE4AEDC0442A}"/>
+                </a:ext>
+              </a:extLst>
+            </p:cNvPr>
+            <p:cNvSpPr txBox="1"/>
+            <p:nvPr/>
+          </p:nvSpPr>
+          <p:spPr>
+            <a:xfrm>
+              <a:off x="4273743" y="3106586"/>
+              <a:ext cx="1358413" cy="400110"/>
+            </a:xfrm>
+            <a:prstGeom prst="rect">
+              <a:avLst/>
+            </a:prstGeom>
+            <a:noFill/>
+          </p:spPr>
+          <p:txBody>
+            <a:bodyPr wrap="square">
+              <a:spAutoFit/>
+            </a:bodyPr>
+            <a:lstStyle/>
+            <a:p>
+              <a:pPr algn="ctr"/>
+              <a:r>
+                <a:rPr lang="en-US" sz="2000" b="1" dirty="0">
+                  <a:solidFill>
+                    <a:srgbClr val="7030A0"/>
+                  </a:solidFill>
+                  <a:effectLst>
+                    <a:outerShdw blurRad="50800" dist="38100" dir="5400000" algn="t" rotWithShape="0">
+                      <a:prstClr val="black">
+                        <a:alpha val="40000"/>
+                      </a:prstClr>
+                    </a:outerShdw>
+                  </a:effectLst>
+                  <a:latin typeface="Univers Condensed" panose="020B0506020202050204" pitchFamily="34" charset="0"/>
+                </a:rPr>
+                <a:t>Organizers</a:t>
+              </a:r>
+            </a:p>
+          </p:txBody>
+        </p:sp>
+        <p:grpSp>
+          <p:nvGrpSpPr>
+            <p:cNvPr id="61" name="Group 60">
+              <a:extLst>
+                <a:ext uri="{FF2B5EF4-FFF2-40B4-BE49-F238E27FC236}">
+                  <a16:creationId xmlns:a16="http://schemas.microsoft.com/office/drawing/2014/main" id="{6A791C45-CD3A-758F-03A2-A318AD08E1F8}"/>
+                </a:ext>
+              </a:extLst>
+            </p:cNvPr>
+            <p:cNvGrpSpPr/>
+            <p:nvPr/>
+          </p:nvGrpSpPr>
+          <p:grpSpPr>
+            <a:xfrm>
+              <a:off x="2091419" y="3532735"/>
+              <a:ext cx="899997" cy="1010607"/>
+              <a:chOff x="2076179" y="3542895"/>
+              <a:chExt cx="899997" cy="1010607"/>
+            </a:xfrm>
+          </p:grpSpPr>
+          <p:pic>
+            <p:nvPicPr>
+              <p:cNvPr id="43" name="Picture 42">
+                <a:extLst>
+                  <a:ext uri="{FF2B5EF4-FFF2-40B4-BE49-F238E27FC236}">
+                    <a16:creationId xmlns:a16="http://schemas.microsoft.com/office/drawing/2014/main" id="{01BF2200-E52C-7FC6-FC80-082561CBE9B4}"/>
+                  </a:ext>
+                </a:extLst>
+              </p:cNvPr>
+              <p:cNvPicPr>
+                <a:picLocks noChangeAspect="1"/>
+              </p:cNvPicPr>
+              <p:nvPr/>
+            </p:nvPicPr>
+            <p:blipFill>
+              <a:blip r:embed="rId10">
+                <a:extLst>
+                  <a:ext uri="{96DAC541-7B7A-43D3-8B79-37D633B846F1}">
+                    <asvg:svgBlip xmlns:asvg="http://schemas.microsoft.com/office/drawing/2016/SVG/main" r:embed="rId11"/>
+                  </a:ext>
+                </a:extLst>
+              </a:blip>
+              <a:srcRect/>
+              <a:stretch/>
+            </p:blipFill>
+            <p:spPr>
+              <a:xfrm>
+                <a:off x="2239372" y="3542895"/>
+                <a:ext cx="628772" cy="631854"/>
+              </a:xfrm>
+              <a:prstGeom prst="rect">
+                <a:avLst/>
+              </a:prstGeom>
+              <a:effectLst>
+                <a:outerShdw blurRad="63500" sx="102000" sy="102000" algn="ctr" rotWithShape="0">
+                  <a:prstClr val="black">
+                    <a:alpha val="40000"/>
+                  </a:prstClr>
+                </a:outerShdw>
+              </a:effectLst>
+            </p:spPr>
+          </p:pic>
+          <p:sp>
+            <p:nvSpPr>
+              <p:cNvPr id="52" name="TextBox 51">
+                <a:extLst>
+                  <a:ext uri="{FF2B5EF4-FFF2-40B4-BE49-F238E27FC236}">
+                    <a16:creationId xmlns:a16="http://schemas.microsoft.com/office/drawing/2014/main" id="{92FC4E0C-792C-B207-FBFF-843ADEFBF81C}"/>
+                  </a:ext>
+                </a:extLst>
+              </p:cNvPr>
+              <p:cNvSpPr txBox="1"/>
+              <p:nvPr/>
+            </p:nvSpPr>
+            <p:spPr>
+              <a:xfrm>
+                <a:off x="2076179" y="4138004"/>
+                <a:ext cx="899997" cy="415498"/>
+              </a:xfrm>
+              <a:prstGeom prst="rect">
+                <a:avLst/>
+              </a:prstGeom>
+              <a:noFill/>
+            </p:spPr>
+            <p:txBody>
+              <a:bodyPr wrap="square">
+                <a:spAutoFit/>
+              </a:bodyPr>
+              <a:lstStyle/>
+              <a:p>
+                <a:pPr algn="ctr"/>
+                <a:r>
+                  <a:rPr lang="en-US" sz="1050" b="1" dirty="0">
+                    <a:solidFill>
+                      <a:schemeClr val="tx1"/>
+                    </a:solidFill>
+                    <a:effectLst>
+                      <a:innerShdw blurRad="114300">
+                        <a:prstClr val="black"/>
+                      </a:innerShdw>
+                    </a:effectLst>
+                    <a:latin typeface="Univers Condensed" panose="020B0506020202050204" pitchFamily="34" charset="0"/>
+                  </a:rPr>
+                  <a:t>Bharatesh </a:t>
+                </a:r>
+              </a:p>
+              <a:p>
+                <a:pPr algn="ctr"/>
+                <a:r>
+                  <a:rPr lang="en-US" sz="1050" b="1" dirty="0">
+                    <a:solidFill>
+                      <a:schemeClr val="tx1"/>
+                    </a:solidFill>
+                    <a:effectLst>
+                      <a:innerShdw blurRad="114300">
+                        <a:prstClr val="black"/>
+                      </a:innerShdw>
+                    </a:effectLst>
+                    <a:latin typeface="Univers Condensed" panose="020B0506020202050204" pitchFamily="34" charset="0"/>
+                  </a:rPr>
+                  <a:t>Chakravarthi</a:t>
+                </a:r>
+                <a:endParaRPr lang="en-US" sz="1050" dirty="0">
+                  <a:solidFill>
+                    <a:schemeClr val="tx1"/>
+                  </a:solidFill>
+                </a:endParaRPr>
+              </a:p>
+            </p:txBody>
+          </p:sp>
+        </p:grpSp>
+        <p:grpSp>
+          <p:nvGrpSpPr>
+            <p:cNvPr id="62" name="Group 61">
+              <a:extLst>
+                <a:ext uri="{FF2B5EF4-FFF2-40B4-BE49-F238E27FC236}">
+                  <a16:creationId xmlns:a16="http://schemas.microsoft.com/office/drawing/2014/main" id="{B40613D2-A94F-3D98-4340-4AA2D00C80BC}"/>
+                </a:ext>
+              </a:extLst>
+            </p:cNvPr>
+            <p:cNvGrpSpPr/>
+            <p:nvPr/>
+          </p:nvGrpSpPr>
+          <p:grpSpPr>
+            <a:xfrm>
+              <a:off x="3015469" y="3548869"/>
+              <a:ext cx="640235" cy="992844"/>
+              <a:chOff x="2999545" y="3553973"/>
+              <a:chExt cx="640235" cy="992844"/>
+            </a:xfrm>
+          </p:grpSpPr>
+          <p:pic>
+            <p:nvPicPr>
+              <p:cNvPr id="44" name="Picture 43">
+                <a:extLst>
+                  <a:ext uri="{FF2B5EF4-FFF2-40B4-BE49-F238E27FC236}">
+                    <a16:creationId xmlns:a16="http://schemas.microsoft.com/office/drawing/2014/main" id="{8B9C360D-AE49-47D6-83DE-3D16E9048968}"/>
+                  </a:ext>
+                </a:extLst>
+              </p:cNvPr>
+              <p:cNvPicPr>
+                <a:picLocks noChangeAspect="1"/>
+              </p:cNvPicPr>
+              <p:nvPr/>
+            </p:nvPicPr>
+            <p:blipFill>
+              <a:blip r:embed="rId12">
+                <a:extLst>
+                  <a:ext uri="{96DAC541-7B7A-43D3-8B79-37D633B846F1}">
+                    <asvg:svgBlip xmlns:asvg="http://schemas.microsoft.com/office/drawing/2016/SVG/main" r:embed="rId13"/>
+                  </a:ext>
+                </a:extLst>
+              </a:blip>
+              <a:srcRect/>
+              <a:stretch/>
+            </p:blipFill>
+            <p:spPr>
+              <a:xfrm>
+                <a:off x="2999545" y="3553973"/>
+                <a:ext cx="626553" cy="632726"/>
+              </a:xfrm>
+              <a:prstGeom prst="rect">
+                <a:avLst/>
+              </a:prstGeom>
+              <a:effectLst>
+                <a:outerShdw blurRad="63500" sx="102000" sy="102000" algn="ctr" rotWithShape="0">
+                  <a:prstClr val="black">
+                    <a:alpha val="40000"/>
+                  </a:prstClr>
+                </a:outerShdw>
+              </a:effectLst>
+            </p:spPr>
+          </p:pic>
+          <p:sp>
+            <p:nvSpPr>
+              <p:cNvPr id="53" name="TextBox 52">
+                <a:extLst>
+                  <a:ext uri="{FF2B5EF4-FFF2-40B4-BE49-F238E27FC236}">
+                    <a16:creationId xmlns:a16="http://schemas.microsoft.com/office/drawing/2014/main" id="{2788255F-7EF2-601A-BBAE-0674E390416E}"/>
+                  </a:ext>
+                </a:extLst>
+              </p:cNvPr>
+              <p:cNvSpPr txBox="1"/>
+              <p:nvPr/>
+            </p:nvSpPr>
+            <p:spPr>
+              <a:xfrm>
+                <a:off x="3013226" y="4131319"/>
+                <a:ext cx="626554" cy="415498"/>
+              </a:xfrm>
+              <a:prstGeom prst="rect">
+                <a:avLst/>
+              </a:prstGeom>
+              <a:noFill/>
+            </p:spPr>
+            <p:txBody>
+              <a:bodyPr wrap="square">
+                <a:spAutoFit/>
+              </a:bodyPr>
+              <a:lstStyle/>
+              <a:p>
+                <a:pPr algn="ctr"/>
+                <a:r>
+                  <a:rPr lang="en-US" sz="1050" b="1" dirty="0">
+                    <a:solidFill>
+                      <a:schemeClr val="tx1"/>
+                    </a:solidFill>
+                    <a:effectLst>
+                      <a:innerShdw blurRad="114300">
+                        <a:prstClr val="black"/>
+                      </a:innerShdw>
+                    </a:effectLst>
+                    <a:latin typeface="Univers Condensed" panose="020B0506020202050204" pitchFamily="34" charset="0"/>
+                  </a:rPr>
+                  <a:t>Yezhou </a:t>
+                </a:r>
+              </a:p>
+              <a:p>
+                <a:pPr algn="ctr"/>
+                <a:r>
+                  <a:rPr lang="en-US" sz="1050" b="1" dirty="0">
+                    <a:solidFill>
+                      <a:schemeClr val="tx1"/>
+                    </a:solidFill>
+                    <a:effectLst>
+                      <a:innerShdw blurRad="114300">
+                        <a:prstClr val="black"/>
+                      </a:innerShdw>
+                    </a:effectLst>
+                    <a:latin typeface="Univers Condensed" panose="020B0506020202050204" pitchFamily="34" charset="0"/>
+                  </a:rPr>
+                  <a:t>Yang</a:t>
+                </a:r>
+                <a:endParaRPr lang="en-US" sz="1050" dirty="0">
+                  <a:solidFill>
+                    <a:schemeClr val="tx1"/>
+                  </a:solidFill>
+                </a:endParaRPr>
+              </a:p>
+            </p:txBody>
+          </p:sp>
+        </p:grpSp>
+        <p:grpSp>
+          <p:nvGrpSpPr>
+            <p:cNvPr id="63" name="Group 62">
+              <a:extLst>
+                <a:ext uri="{FF2B5EF4-FFF2-40B4-BE49-F238E27FC236}">
+                  <a16:creationId xmlns:a16="http://schemas.microsoft.com/office/drawing/2014/main" id="{ACC0C37F-7426-BF69-D1E6-5E3143BB43B0}"/>
+                </a:ext>
+              </a:extLst>
+            </p:cNvPr>
+            <p:cNvGrpSpPr/>
+            <p:nvPr/>
+          </p:nvGrpSpPr>
+          <p:grpSpPr>
+            <a:xfrm>
+              <a:off x="3615748" y="3537887"/>
+              <a:ext cx="844539" cy="1003827"/>
+              <a:chOff x="3600508" y="3548047"/>
+              <a:chExt cx="844539" cy="1003827"/>
+            </a:xfrm>
+          </p:grpSpPr>
+          <p:pic>
+            <p:nvPicPr>
+              <p:cNvPr id="45" name="Picture 44">
+                <a:extLst>
+                  <a:ext uri="{FF2B5EF4-FFF2-40B4-BE49-F238E27FC236}">
+                    <a16:creationId xmlns:a16="http://schemas.microsoft.com/office/drawing/2014/main" id="{708284E2-6426-7809-D1D8-4BD8065B82E5}"/>
+                  </a:ext>
+                </a:extLst>
+              </p:cNvPr>
+              <p:cNvPicPr>
+                <a:picLocks noChangeAspect="1"/>
+              </p:cNvPicPr>
+              <p:nvPr/>
+            </p:nvPicPr>
+            <p:blipFill>
+              <a:blip r:embed="rId14">
+                <a:extLst>
+                  <a:ext uri="{96DAC541-7B7A-43D3-8B79-37D633B846F1}">
+                    <asvg:svgBlip xmlns:asvg="http://schemas.microsoft.com/office/drawing/2016/SVG/main" r:embed="rId15"/>
+                  </a:ext>
+                </a:extLst>
+              </a:blip>
+              <a:srcRect/>
+              <a:stretch/>
+            </p:blipFill>
+            <p:spPr>
+              <a:xfrm>
+                <a:off x="3742599" y="3548047"/>
+                <a:ext cx="628772" cy="631854"/>
+              </a:xfrm>
+              <a:prstGeom prst="rect">
+                <a:avLst/>
+              </a:prstGeom>
+              <a:effectLst>
+                <a:outerShdw blurRad="63500" sx="102000" sy="102000" algn="ctr" rotWithShape="0">
+                  <a:prstClr val="black">
+                    <a:alpha val="40000"/>
+                  </a:prstClr>
+                </a:outerShdw>
+              </a:effectLst>
+            </p:spPr>
+          </p:pic>
+          <p:sp>
+            <p:nvSpPr>
+              <p:cNvPr id="54" name="TextBox 53">
+                <a:extLst>
+                  <a:ext uri="{FF2B5EF4-FFF2-40B4-BE49-F238E27FC236}">
+                    <a16:creationId xmlns:a16="http://schemas.microsoft.com/office/drawing/2014/main" id="{AE969D49-699F-8722-36F7-9F3BFA848100}"/>
+                  </a:ext>
+                </a:extLst>
+              </p:cNvPr>
+              <p:cNvSpPr txBox="1"/>
+              <p:nvPr/>
+            </p:nvSpPr>
+            <p:spPr>
+              <a:xfrm>
+                <a:off x="3600508" y="4136376"/>
+                <a:ext cx="844539" cy="415498"/>
+              </a:xfrm>
+              <a:prstGeom prst="rect">
+                <a:avLst/>
+              </a:prstGeom>
+              <a:noFill/>
+            </p:spPr>
+            <p:txBody>
+              <a:bodyPr wrap="square">
+                <a:spAutoFit/>
+              </a:bodyPr>
+              <a:lstStyle/>
+              <a:p>
+                <a:pPr algn="ctr"/>
+                <a:r>
+                  <a:rPr lang="en-US" sz="1050" b="1" dirty="0">
+                    <a:solidFill>
+                      <a:schemeClr val="tx1"/>
+                    </a:solidFill>
+                    <a:effectLst>
+                      <a:innerShdw blurRad="114300">
+                        <a:prstClr val="black"/>
+                      </a:innerShdw>
+                    </a:effectLst>
+                    <a:latin typeface="Univers Condensed" panose="020B0506020202050204" pitchFamily="34" charset="0"/>
+                  </a:rPr>
+                  <a:t>Cornelia M. Fermuller</a:t>
+                </a:r>
+                <a:endParaRPr lang="en-US" sz="1050" dirty="0">
+                  <a:solidFill>
+                    <a:schemeClr val="tx1"/>
+                  </a:solidFill>
+                </a:endParaRPr>
+              </a:p>
+            </p:txBody>
+          </p:sp>
+        </p:grpSp>
+        <p:grpSp>
+          <p:nvGrpSpPr>
+            <p:cNvPr id="65" name="Group 64">
+              <a:extLst>
+                <a:ext uri="{FF2B5EF4-FFF2-40B4-BE49-F238E27FC236}">
+                  <a16:creationId xmlns:a16="http://schemas.microsoft.com/office/drawing/2014/main" id="{06981BED-89E7-9EED-EDCF-485977BC78E3}"/>
+                </a:ext>
+              </a:extLst>
+            </p:cNvPr>
+            <p:cNvGrpSpPr/>
+            <p:nvPr/>
+          </p:nvGrpSpPr>
+          <p:grpSpPr>
+            <a:xfrm>
+              <a:off x="4370604" y="3526950"/>
+              <a:ext cx="844539" cy="1008317"/>
+              <a:chOff x="4346898" y="3537110"/>
+              <a:chExt cx="844539" cy="1008317"/>
+            </a:xfrm>
+          </p:grpSpPr>
+          <p:pic>
+            <p:nvPicPr>
+              <p:cNvPr id="46" name="Picture 45">
+                <a:extLst>
+                  <a:ext uri="{FF2B5EF4-FFF2-40B4-BE49-F238E27FC236}">
+                    <a16:creationId xmlns:a16="http://schemas.microsoft.com/office/drawing/2014/main" id="{69324C0E-D214-7A2F-E424-525276686035}"/>
+                  </a:ext>
+                </a:extLst>
+              </p:cNvPr>
+              <p:cNvPicPr>
+                <a:picLocks noChangeAspect="1"/>
+              </p:cNvPicPr>
+              <p:nvPr/>
+            </p:nvPicPr>
+            <p:blipFill>
+              <a:blip r:embed="rId16">
+                <a:extLst>
+                  <a:ext uri="{96DAC541-7B7A-43D3-8B79-37D633B846F1}">
+                    <asvg:svgBlip xmlns:asvg="http://schemas.microsoft.com/office/drawing/2016/SVG/main" r:embed="rId17"/>
+                  </a:ext>
+                </a:extLst>
+              </a:blip>
+              <a:srcRect/>
+              <a:stretch/>
+            </p:blipFill>
+            <p:spPr>
+              <a:xfrm>
+                <a:off x="4463047" y="3537110"/>
+                <a:ext cx="626553" cy="632726"/>
+              </a:xfrm>
+              <a:prstGeom prst="rect">
+                <a:avLst/>
+              </a:prstGeom>
+              <a:effectLst>
+                <a:outerShdw blurRad="63500" sx="102000" sy="102000" algn="ctr" rotWithShape="0">
+                  <a:prstClr val="black">
+                    <a:alpha val="40000"/>
+                  </a:prstClr>
+                </a:outerShdw>
+              </a:effectLst>
+            </p:spPr>
+          </p:pic>
+          <p:sp>
+            <p:nvSpPr>
+              <p:cNvPr id="56" name="TextBox 55">
+                <a:extLst>
+                  <a:ext uri="{FF2B5EF4-FFF2-40B4-BE49-F238E27FC236}">
+                    <a16:creationId xmlns:a16="http://schemas.microsoft.com/office/drawing/2014/main" id="{DBE9DB6B-4CA4-0CDA-A94A-A07F5C1E8413}"/>
+                  </a:ext>
+                </a:extLst>
+              </p:cNvPr>
+              <p:cNvSpPr txBox="1"/>
+              <p:nvPr/>
+            </p:nvSpPr>
+            <p:spPr>
+              <a:xfrm>
+                <a:off x="4346898" y="4129929"/>
+                <a:ext cx="844539" cy="415498"/>
+              </a:xfrm>
+              <a:prstGeom prst="rect">
+                <a:avLst/>
+              </a:prstGeom>
+              <a:noFill/>
+            </p:spPr>
+            <p:txBody>
+              <a:bodyPr wrap="square">
+                <a:spAutoFit/>
+              </a:bodyPr>
+              <a:lstStyle/>
+              <a:p>
+                <a:pPr algn="ctr"/>
+                <a:r>
+                  <a:rPr lang="en-US" sz="1050" b="1" dirty="0">
+                    <a:solidFill>
+                      <a:schemeClr val="tx1"/>
+                    </a:solidFill>
+                    <a:effectLst>
+                      <a:innerShdw blurRad="114300">
+                        <a:prstClr val="black"/>
+                      </a:innerShdw>
+                    </a:effectLst>
+                    <a:latin typeface="Univers Condensed" panose="020B0506020202050204" pitchFamily="34" charset="0"/>
+                  </a:rPr>
+                  <a:t>Francisco Barranco</a:t>
+                </a:r>
+                <a:endParaRPr lang="en-US" sz="1050" dirty="0">
+                  <a:solidFill>
+                    <a:schemeClr val="tx1"/>
+                  </a:solidFill>
+                </a:endParaRPr>
+              </a:p>
+            </p:txBody>
+          </p:sp>
+        </p:grpSp>
+        <p:grpSp>
+          <p:nvGrpSpPr>
+            <p:cNvPr id="64" name="Group 63">
+              <a:extLst>
+                <a:ext uri="{FF2B5EF4-FFF2-40B4-BE49-F238E27FC236}">
+                  <a16:creationId xmlns:a16="http://schemas.microsoft.com/office/drawing/2014/main" id="{0041C03A-DB0A-B39B-4097-D810127254A2}"/>
+                </a:ext>
+              </a:extLst>
+            </p:cNvPr>
+            <p:cNvGrpSpPr/>
+            <p:nvPr/>
+          </p:nvGrpSpPr>
+          <p:grpSpPr>
+            <a:xfrm>
+              <a:off x="5137567" y="3548869"/>
+              <a:ext cx="758846" cy="999626"/>
+              <a:chOff x="5122327" y="3559029"/>
+              <a:chExt cx="758846" cy="999626"/>
+            </a:xfrm>
+          </p:grpSpPr>
+          <p:pic>
+            <p:nvPicPr>
+              <p:cNvPr id="47" name="Picture 46">
+                <a:extLst>
+                  <a:ext uri="{FF2B5EF4-FFF2-40B4-BE49-F238E27FC236}">
+                    <a16:creationId xmlns:a16="http://schemas.microsoft.com/office/drawing/2014/main" id="{3BD37BCF-0054-0121-2D91-C7B161D4A929}"/>
+                  </a:ext>
+                </a:extLst>
+              </p:cNvPr>
+              <p:cNvPicPr>
+                <a:picLocks noChangeAspect="1"/>
+              </p:cNvPicPr>
+              <p:nvPr/>
+            </p:nvPicPr>
+            <p:blipFill>
+              <a:blip r:embed="rId18">
+                <a:extLst>
+                  <a:ext uri="{96DAC541-7B7A-43D3-8B79-37D633B846F1}">
+                    <asvg:svgBlip xmlns:asvg="http://schemas.microsoft.com/office/drawing/2016/SVG/main" r:embed="rId19"/>
+                  </a:ext>
+                </a:extLst>
+              </a:blip>
+              <a:srcRect/>
+              <a:stretch/>
+            </p:blipFill>
+            <p:spPr>
+              <a:xfrm>
+                <a:off x="5195317" y="3559029"/>
+                <a:ext cx="628772" cy="631854"/>
+              </a:xfrm>
+              <a:prstGeom prst="rect">
+                <a:avLst/>
+              </a:prstGeom>
+              <a:effectLst>
+                <a:outerShdw blurRad="63500" sx="102000" sy="102000" algn="ctr" rotWithShape="0">
+                  <a:prstClr val="black">
+                    <a:alpha val="40000"/>
+                  </a:prstClr>
+                </a:outerShdw>
+              </a:effectLst>
+            </p:spPr>
+          </p:pic>
+          <p:sp>
+            <p:nvSpPr>
+              <p:cNvPr id="57" name="TextBox 56">
+                <a:extLst>
+                  <a:ext uri="{FF2B5EF4-FFF2-40B4-BE49-F238E27FC236}">
+                    <a16:creationId xmlns:a16="http://schemas.microsoft.com/office/drawing/2014/main" id="{54B0E6DD-E17C-66B2-0117-15CAA31257A1}"/>
+                  </a:ext>
+                </a:extLst>
+              </p:cNvPr>
+              <p:cNvSpPr txBox="1"/>
+              <p:nvPr/>
+            </p:nvSpPr>
+            <p:spPr>
+              <a:xfrm>
+                <a:off x="5122327" y="4143157"/>
+                <a:ext cx="758846" cy="415498"/>
+              </a:xfrm>
+              <a:prstGeom prst="rect">
+                <a:avLst/>
+              </a:prstGeom>
+              <a:noFill/>
+            </p:spPr>
+            <p:txBody>
+              <a:bodyPr wrap="square">
+                <a:spAutoFit/>
+              </a:bodyPr>
+              <a:lstStyle/>
+              <a:p>
+                <a:pPr algn="ctr"/>
+                <a:r>
+                  <a:rPr lang="en-US" sz="1050" b="1" dirty="0">
+                    <a:solidFill>
+                      <a:schemeClr val="tx1"/>
+                    </a:solidFill>
+                    <a:effectLst>
+                      <a:innerShdw blurRad="114300">
+                        <a:prstClr val="black"/>
+                      </a:innerShdw>
+                    </a:effectLst>
+                    <a:latin typeface="Univers Condensed" panose="020B0506020202050204" pitchFamily="34" charset="0"/>
+                  </a:rPr>
+                  <a:t>Federico Becattini</a:t>
+                </a:r>
+                <a:endParaRPr lang="en-US" sz="1050" dirty="0">
+                  <a:solidFill>
+                    <a:schemeClr val="tx1"/>
+                  </a:solidFill>
+                </a:endParaRPr>
+              </a:p>
+            </p:txBody>
+          </p:sp>
+        </p:grpSp>
+        <p:grpSp>
+          <p:nvGrpSpPr>
+            <p:cNvPr id="66" name="Group 65">
+              <a:extLst>
+                <a:ext uri="{FF2B5EF4-FFF2-40B4-BE49-F238E27FC236}">
+                  <a16:creationId xmlns:a16="http://schemas.microsoft.com/office/drawing/2014/main" id="{C32D56BD-BBEC-A6B8-4C07-C18DB2B668B8}"/>
+                </a:ext>
+              </a:extLst>
+            </p:cNvPr>
+            <p:cNvGrpSpPr/>
+            <p:nvPr/>
+          </p:nvGrpSpPr>
+          <p:grpSpPr>
+            <a:xfrm>
+              <a:off x="5883000" y="3543813"/>
+              <a:ext cx="794083" cy="991454"/>
+              <a:chOff x="5867760" y="3553973"/>
+              <a:chExt cx="794083" cy="991454"/>
+            </a:xfrm>
+          </p:grpSpPr>
+          <p:pic>
+            <p:nvPicPr>
+              <p:cNvPr id="48" name="Picture 47">
+                <a:extLst>
+                  <a:ext uri="{FF2B5EF4-FFF2-40B4-BE49-F238E27FC236}">
+                    <a16:creationId xmlns:a16="http://schemas.microsoft.com/office/drawing/2014/main" id="{E1CF6313-B635-D372-7925-DB78944581E1}"/>
+                  </a:ext>
+                </a:extLst>
+              </p:cNvPr>
+              <p:cNvPicPr>
+                <a:picLocks noChangeAspect="1"/>
+              </p:cNvPicPr>
+              <p:nvPr/>
+            </p:nvPicPr>
+            <p:blipFill>
+              <a:blip r:embed="rId20">
+                <a:extLst>
+                  <a:ext uri="{96DAC541-7B7A-43D3-8B79-37D633B846F1}">
+                    <asvg:svgBlip xmlns:asvg="http://schemas.microsoft.com/office/drawing/2016/SVG/main" r:embed="rId21"/>
+                  </a:ext>
+                </a:extLst>
+              </a:blip>
+              <a:srcRect/>
+              <a:stretch/>
+            </p:blipFill>
+            <p:spPr>
+              <a:xfrm>
+                <a:off x="5934226" y="3553973"/>
+                <a:ext cx="626553" cy="632726"/>
+              </a:xfrm>
+              <a:prstGeom prst="rect">
+                <a:avLst/>
+              </a:prstGeom>
+              <a:effectLst>
+                <a:outerShdw blurRad="63500" sx="102000" sy="102000" algn="ctr" rotWithShape="0">
+                  <a:prstClr val="black">
+                    <a:alpha val="40000"/>
+                  </a:prstClr>
+                </a:outerShdw>
+              </a:effectLst>
+            </p:spPr>
+          </p:pic>
+          <p:sp>
+            <p:nvSpPr>
+              <p:cNvPr id="58" name="TextBox 57">
+                <a:extLst>
+                  <a:ext uri="{FF2B5EF4-FFF2-40B4-BE49-F238E27FC236}">
+                    <a16:creationId xmlns:a16="http://schemas.microsoft.com/office/drawing/2014/main" id="{CA7C4419-7980-8079-295E-56A2E5B84F6B}"/>
+                  </a:ext>
+                </a:extLst>
+              </p:cNvPr>
+              <p:cNvSpPr txBox="1"/>
+              <p:nvPr/>
+            </p:nvSpPr>
+            <p:spPr>
+              <a:xfrm>
+                <a:off x="5867760" y="4129929"/>
+                <a:ext cx="794083" cy="415498"/>
+              </a:xfrm>
+              <a:prstGeom prst="rect">
+                <a:avLst/>
+              </a:prstGeom>
+              <a:noFill/>
+            </p:spPr>
+            <p:txBody>
+              <a:bodyPr wrap="square">
+                <a:spAutoFit/>
+              </a:bodyPr>
+              <a:lstStyle/>
+              <a:p>
+                <a:pPr algn="ctr"/>
+                <a:r>
+                  <a:rPr lang="en-US" sz="1050" b="1" dirty="0">
+                    <a:solidFill>
+                      <a:schemeClr val="tx1"/>
+                    </a:solidFill>
+                    <a:effectLst>
+                      <a:innerShdw blurRad="114300">
+                        <a:prstClr val="black"/>
+                      </a:innerShdw>
+                    </a:effectLst>
+                    <a:latin typeface="Univers Condensed" panose="020B0506020202050204" pitchFamily="34" charset="0"/>
+                  </a:rPr>
+                  <a:t>Aayush Atul Verma</a:t>
+                </a:r>
+                <a:endParaRPr lang="en-US" sz="1050" dirty="0">
+                  <a:solidFill>
+                    <a:schemeClr val="tx1"/>
+                  </a:solidFill>
+                </a:endParaRPr>
+              </a:p>
+            </p:txBody>
+          </p:sp>
+        </p:grpSp>
+        <p:grpSp>
+          <p:nvGrpSpPr>
+            <p:cNvPr id="67" name="Group 66">
+              <a:extLst>
+                <a:ext uri="{FF2B5EF4-FFF2-40B4-BE49-F238E27FC236}">
+                  <a16:creationId xmlns:a16="http://schemas.microsoft.com/office/drawing/2014/main" id="{7735DC28-0071-F83E-F6D7-32FC474CC692}"/>
+                </a:ext>
+              </a:extLst>
+            </p:cNvPr>
+            <p:cNvGrpSpPr/>
+            <p:nvPr/>
+          </p:nvGrpSpPr>
+          <p:grpSpPr>
+            <a:xfrm>
+              <a:off x="6677427" y="3526950"/>
+              <a:ext cx="679262" cy="1005035"/>
+              <a:chOff x="6662187" y="3537110"/>
+              <a:chExt cx="679262" cy="1005035"/>
+            </a:xfrm>
+          </p:grpSpPr>
+          <p:pic>
+            <p:nvPicPr>
+              <p:cNvPr id="49" name="Picture 48">
+                <a:extLst>
+                  <a:ext uri="{FF2B5EF4-FFF2-40B4-BE49-F238E27FC236}">
+                    <a16:creationId xmlns:a16="http://schemas.microsoft.com/office/drawing/2014/main" id="{635E7F48-BEAB-585E-89C3-51DFF98C485D}"/>
+                  </a:ext>
+                </a:extLst>
+              </p:cNvPr>
+              <p:cNvPicPr>
+                <a:picLocks noChangeAspect="1"/>
+              </p:cNvPicPr>
+              <p:nvPr/>
+            </p:nvPicPr>
+            <p:blipFill>
+              <a:blip r:embed="rId22">
+                <a:extLst>
+                  <a:ext uri="{96DAC541-7B7A-43D3-8B79-37D633B846F1}">
+                    <asvg:svgBlip xmlns:asvg="http://schemas.microsoft.com/office/drawing/2016/SVG/main" r:embed="rId23"/>
+                  </a:ext>
+                </a:extLst>
+              </a:blip>
+              <a:srcRect/>
+              <a:stretch/>
+            </p:blipFill>
+            <p:spPr>
+              <a:xfrm>
+                <a:off x="6685698" y="3537110"/>
+                <a:ext cx="626583" cy="632726"/>
+              </a:xfrm>
+              <a:prstGeom prst="rect">
+                <a:avLst/>
+              </a:prstGeom>
+              <a:effectLst>
+                <a:outerShdw blurRad="63500" sx="102000" sy="102000" algn="ctr" rotWithShape="0">
+                  <a:prstClr val="black">
+                    <a:alpha val="40000"/>
+                  </a:prstClr>
+                </a:outerShdw>
+              </a:effectLst>
+            </p:spPr>
+          </p:pic>
+          <p:sp>
+            <p:nvSpPr>
+              <p:cNvPr id="59" name="TextBox 58">
+                <a:extLst>
+                  <a:ext uri="{FF2B5EF4-FFF2-40B4-BE49-F238E27FC236}">
+                    <a16:creationId xmlns:a16="http://schemas.microsoft.com/office/drawing/2014/main" id="{891C5135-C160-5DFA-B004-4CCFD05FDF76}"/>
+                  </a:ext>
+                </a:extLst>
+              </p:cNvPr>
+              <p:cNvSpPr txBox="1"/>
+              <p:nvPr/>
+            </p:nvSpPr>
+            <p:spPr>
+              <a:xfrm>
+                <a:off x="6662187" y="4126647"/>
+                <a:ext cx="679262" cy="415498"/>
+              </a:xfrm>
+              <a:prstGeom prst="rect">
+                <a:avLst/>
+              </a:prstGeom>
+              <a:noFill/>
+            </p:spPr>
+            <p:txBody>
+              <a:bodyPr wrap="square">
+                <a:spAutoFit/>
+              </a:bodyPr>
+              <a:lstStyle/>
+              <a:p>
+                <a:pPr algn="ctr"/>
+                <a:r>
+                  <a:rPr lang="en-US" sz="1050" b="1" dirty="0">
+                    <a:solidFill>
+                      <a:schemeClr val="tx1"/>
+                    </a:solidFill>
+                    <a:effectLst>
+                      <a:innerShdw blurRad="114300">
+                        <a:prstClr val="black"/>
+                      </a:innerShdw>
+                    </a:effectLst>
+                    <a:latin typeface="Univers Condensed" panose="020B0506020202050204" pitchFamily="34" charset="0"/>
+                  </a:rPr>
+                  <a:t>Arpit Vaghela</a:t>
+                </a:r>
+                <a:endParaRPr lang="en-US" sz="1050" dirty="0">
+                  <a:solidFill>
+                    <a:schemeClr val="tx1"/>
+                  </a:solidFill>
+                </a:endParaRPr>
+              </a:p>
+            </p:txBody>
+          </p:sp>
+        </p:grpSp>
+        <p:grpSp>
+          <p:nvGrpSpPr>
+            <p:cNvPr id="68" name="Group 67">
+              <a:extLst>
+                <a:ext uri="{FF2B5EF4-FFF2-40B4-BE49-F238E27FC236}">
+                  <a16:creationId xmlns:a16="http://schemas.microsoft.com/office/drawing/2014/main" id="{6F229020-DC9D-B381-F04A-8847A974B0F1}"/>
+                </a:ext>
+              </a:extLst>
+            </p:cNvPr>
+            <p:cNvGrpSpPr/>
+            <p:nvPr/>
+          </p:nvGrpSpPr>
+          <p:grpSpPr>
+            <a:xfrm>
+              <a:off x="7391377" y="3527822"/>
+              <a:ext cx="686639" cy="991974"/>
+              <a:chOff x="7376137" y="3537982"/>
+              <a:chExt cx="686639" cy="991974"/>
+            </a:xfrm>
+          </p:grpSpPr>
+          <p:pic>
+            <p:nvPicPr>
+              <p:cNvPr id="50" name="Picture 49">
+                <a:extLst>
+                  <a:ext uri="{FF2B5EF4-FFF2-40B4-BE49-F238E27FC236}">
+                    <a16:creationId xmlns:a16="http://schemas.microsoft.com/office/drawing/2014/main" id="{5C87BC0D-88C8-7A7E-1E89-5C34A72150E0}"/>
+                  </a:ext>
+                </a:extLst>
+              </p:cNvPr>
+              <p:cNvPicPr>
+                <a:picLocks noChangeAspect="1"/>
+              </p:cNvPicPr>
+              <p:nvPr/>
+            </p:nvPicPr>
+            <p:blipFill>
+              <a:blip r:embed="rId24">
+                <a:extLst>
+                  <a:ext uri="{96DAC541-7B7A-43D3-8B79-37D633B846F1}">
+                    <asvg:svgBlip xmlns:asvg="http://schemas.microsoft.com/office/drawing/2016/SVG/main" r:embed="rId25"/>
+                  </a:ext>
+                </a:extLst>
+              </a:blip>
+              <a:srcRect/>
+              <a:stretch/>
+            </p:blipFill>
+            <p:spPr>
+              <a:xfrm>
+                <a:off x="7413384" y="3537982"/>
+                <a:ext cx="628772" cy="631854"/>
+              </a:xfrm>
+              <a:prstGeom prst="rect">
+                <a:avLst/>
+              </a:prstGeom>
+              <a:effectLst>
+                <a:outerShdw blurRad="63500" sx="102000" sy="102000" algn="ctr" rotWithShape="0">
+                  <a:prstClr val="black">
+                    <a:alpha val="40000"/>
+                  </a:prstClr>
+                </a:outerShdw>
+              </a:effectLst>
+            </p:spPr>
+          </p:pic>
+          <p:sp>
+            <p:nvSpPr>
+              <p:cNvPr id="60" name="TextBox 59">
+                <a:extLst>
+                  <a:ext uri="{FF2B5EF4-FFF2-40B4-BE49-F238E27FC236}">
+                    <a16:creationId xmlns:a16="http://schemas.microsoft.com/office/drawing/2014/main" id="{CAC55A44-F40A-D6FB-55AD-610623DE1263}"/>
+                  </a:ext>
+                </a:extLst>
+              </p:cNvPr>
+              <p:cNvSpPr txBox="1"/>
+              <p:nvPr/>
+            </p:nvSpPr>
+            <p:spPr>
+              <a:xfrm>
+                <a:off x="7376137" y="4114458"/>
+                <a:ext cx="686639" cy="415498"/>
+              </a:xfrm>
+              <a:prstGeom prst="rect">
+                <a:avLst/>
+              </a:prstGeom>
+              <a:noFill/>
+            </p:spPr>
+            <p:txBody>
+              <a:bodyPr wrap="square">
+                <a:spAutoFit/>
+              </a:bodyPr>
+              <a:lstStyle/>
+              <a:p>
+                <a:pPr algn="ctr"/>
+                <a:r>
+                  <a:rPr lang="en-US" sz="1050" b="1" dirty="0">
+                    <a:solidFill>
+                      <a:schemeClr val="tx1"/>
+                    </a:solidFill>
+                    <a:effectLst>
+                      <a:innerShdw blurRad="114300">
+                        <a:prstClr val="black"/>
+                      </a:innerShdw>
+                    </a:effectLst>
+                    <a:latin typeface="Univers Condensed" panose="020B0506020202050204" pitchFamily="34" charset="0"/>
+                  </a:rPr>
+                  <a:t>Kaustav Chanda </a:t>
+                </a:r>
+                <a:endParaRPr lang="en-US" sz="1050" dirty="0">
+                  <a:solidFill>
+                    <a:schemeClr val="tx1"/>
+                  </a:solidFill>
+                </a:endParaRPr>
               </a:p>
             </p:txBody>
           </p:sp>
         </p:grpSp>
       </p:grpSp>
-      <p:sp>
-        <p:nvSpPr>
-          <p:cNvPr id="21" name="TextBox 20">
-            <a:extLst>
-              <a:ext uri="{FF2B5EF4-FFF2-40B4-BE49-F238E27FC236}">
-                <a16:creationId xmlns:a16="http://schemas.microsoft.com/office/drawing/2014/main" id="{AE703A41-FBBB-13D8-E913-93DA00C7CB14}"/>
-              </a:ext>
-            </a:extLst>
-          </p:cNvPr>
-          <p:cNvSpPr txBox="1"/>
-          <p:nvPr/>
-        </p:nvSpPr>
-        <p:spPr>
-          <a:xfrm>
-            <a:off x="2435778" y="1365681"/>
-            <a:ext cx="2225123" cy="3477875"/>
-          </a:xfrm>
-          <a:prstGeom prst="rect">
-            <a:avLst/>
-          </a:prstGeom>
-          <a:noFill/>
-        </p:spPr>
-        <p:txBody>
-          <a:bodyPr wrap="square">
-            <a:spAutoFit/>
-          </a:bodyPr>
-          <a:lstStyle/>
-          <a:p>
-            <a:r>
-              <a:rPr lang="en-US" sz="2000" b="1" dirty="0">
-                <a:solidFill>
-                  <a:srgbClr val="FFFF00"/>
-                </a:solidFill>
-                <a:effectLst>
-                  <a:outerShdw blurRad="50800" dist="38100" dir="5400000" algn="t" rotWithShape="0">
-                    <a:prstClr val="black">
-                      <a:alpha val="40000"/>
-                    </a:prstClr>
-                  </a:outerShdw>
-                </a:effectLst>
-                <a:latin typeface="Univers Condensed" panose="020B0506020202050204" pitchFamily="34" charset="0"/>
-              </a:rPr>
-              <a:t>Organizers: </a:t>
-            </a:r>
-          </a:p>
-          <a:p>
-            <a:r>
-              <a:rPr lang="en-US" sz="1600" b="1" dirty="0">
-                <a:solidFill>
-                  <a:srgbClr val="002060"/>
-                </a:solidFill>
-                <a:effectLst>
-                  <a:innerShdw blurRad="114300">
-                    <a:prstClr val="black"/>
-                  </a:innerShdw>
-                </a:effectLst>
-                <a:latin typeface="Univers Condensed" panose="020B0506020202050204" pitchFamily="34" charset="0"/>
-              </a:rPr>
-              <a:t>Bharatesh Chakravarthi, Yezhou Yang,  Cornelia M. Fermuller,  Francisco Barranco,  Federico Becattini,  Aayush Atul Verma, Arpit Vaghela, Kaustav Chanda </a:t>
-            </a:r>
-          </a:p>
-          <a:p>
-            <a:endParaRPr lang="en-US" sz="1600" b="1" dirty="0">
-              <a:solidFill>
-                <a:srgbClr val="002060"/>
-              </a:solidFill>
-              <a:effectLst>
-                <a:innerShdw blurRad="114300">
-                  <a:prstClr val="black"/>
-                </a:innerShdw>
-              </a:effectLst>
-              <a:latin typeface="Univers Condensed" panose="020B0506020202050204" pitchFamily="34" charset="0"/>
-            </a:endParaRPr>
-          </a:p>
-          <a:p>
-            <a:r>
-              <a:rPr lang="en-US" sz="2000" b="1" dirty="0">
-                <a:solidFill>
-                  <a:srgbClr val="FFFF00"/>
-                </a:solidFill>
-                <a:effectLst>
-                  <a:outerShdw blurRad="50800" dist="38100" dir="5400000" algn="t" rotWithShape="0">
-                    <a:prstClr val="black">
-                      <a:alpha val="40000"/>
-                    </a:prstClr>
-                  </a:outerShdw>
-                </a:effectLst>
-                <a:latin typeface="Univers Condensed" panose="020B0506020202050204" pitchFamily="34" charset="0"/>
-              </a:rPr>
-              <a:t>Time: </a:t>
-            </a:r>
-            <a:r>
-              <a:rPr lang="en-US" sz="1600" b="1" dirty="0">
-                <a:solidFill>
-                  <a:srgbClr val="002060"/>
-                </a:solidFill>
-                <a:effectLst>
-                  <a:innerShdw blurRad="114300">
-                    <a:prstClr val="black"/>
-                  </a:innerShdw>
-                </a:effectLst>
-                <a:latin typeface="Univers Condensed" panose="020B0506020202050204" pitchFamily="34" charset="0"/>
-              </a:rPr>
-              <a:t>1 PM – 5:30 PM</a:t>
-            </a:r>
-          </a:p>
-          <a:p>
-            <a:endParaRPr lang="en-US" sz="1600" b="1" dirty="0">
-              <a:solidFill>
-                <a:srgbClr val="002060"/>
-              </a:solidFill>
-              <a:effectLst>
-                <a:innerShdw blurRad="114300">
-                  <a:prstClr val="black"/>
-                </a:innerShdw>
-              </a:effectLst>
-              <a:latin typeface="Univers Condensed" panose="020B0506020202050204" pitchFamily="34" charset="0"/>
-            </a:endParaRPr>
-          </a:p>
-          <a:p>
-            <a:r>
-              <a:rPr lang="en-US" sz="2000" b="1" dirty="0">
-                <a:solidFill>
-                  <a:srgbClr val="FFFF00"/>
-                </a:solidFill>
-                <a:effectLst>
-                  <a:outerShdw blurRad="50800" dist="38100" dir="5400000" algn="t" rotWithShape="0">
-                    <a:prstClr val="black">
-                      <a:alpha val="40000"/>
-                    </a:prstClr>
-                  </a:outerShdw>
-                </a:effectLst>
-                <a:latin typeface="Univers Condensed" panose="020B0506020202050204" pitchFamily="34" charset="0"/>
-              </a:rPr>
-              <a:t>Location: </a:t>
-            </a:r>
-            <a:r>
-              <a:rPr lang="en-US" sz="1600" b="1" dirty="0">
-                <a:solidFill>
-                  <a:srgbClr val="002060"/>
-                </a:solidFill>
-                <a:effectLst>
-                  <a:innerShdw blurRad="114300">
-                    <a:prstClr val="black"/>
-                  </a:innerShdw>
-                </a:effectLst>
-                <a:latin typeface="Univers Condensed" panose="020B0506020202050204" pitchFamily="34" charset="0"/>
-              </a:rPr>
-              <a:t>Arizona Ballroom 7</a:t>
-            </a:r>
-          </a:p>
-        </p:txBody>
-      </p:sp>
-      <p:pic>
-        <p:nvPicPr>
-          <p:cNvPr id="23" name="Picture 22">
-            <a:extLst>
-              <a:ext uri="{FF2B5EF4-FFF2-40B4-BE49-F238E27FC236}">
-                <a16:creationId xmlns:a16="http://schemas.microsoft.com/office/drawing/2014/main" id="{0090962F-5140-EBE6-965C-8057C14482ED}"/>
-              </a:ext>
-            </a:extLst>
-          </p:cNvPr>
-          <p:cNvPicPr>
-            <a:picLocks noChangeAspect="1"/>
-          </p:cNvPicPr>
-          <p:nvPr/>
-        </p:nvPicPr>
-        <p:blipFill>
-          <a:blip r:embed="rId5">
-            <a:clrChange>
-              <a:clrFrom>
-                <a:srgbClr val="FFFFFF"/>
-              </a:clrFrom>
-              <a:clrTo>
-                <a:srgbClr val="FFFFFF">
-                  <a:alpha val="0"/>
-                </a:srgbClr>
-              </a:clrTo>
-            </a:clrChange>
-          </a:blip>
-          <a:stretch>
-            <a:fillRect/>
-          </a:stretch>
-        </p:blipFill>
-        <p:spPr>
-          <a:xfrm>
-            <a:off x="7072939" y="3622482"/>
-            <a:ext cx="1111307" cy="1130358"/>
-          </a:xfrm>
-          <a:prstGeom prst="rect">
-            <a:avLst/>
-          </a:prstGeom>
-        </p:spPr>
-      </p:pic>
-      <p:sp>
-        <p:nvSpPr>
-          <p:cNvPr id="24" name="TextBox 23">
-            <a:extLst>
-              <a:ext uri="{FF2B5EF4-FFF2-40B4-BE49-F238E27FC236}">
-                <a16:creationId xmlns:a16="http://schemas.microsoft.com/office/drawing/2014/main" id="{5E92B06D-75CA-DB59-35CE-0AAAED231A94}"/>
-              </a:ext>
-            </a:extLst>
-          </p:cNvPr>
-          <p:cNvSpPr txBox="1"/>
-          <p:nvPr/>
-        </p:nvSpPr>
-        <p:spPr>
-          <a:xfrm>
-            <a:off x="5301188" y="1365681"/>
-            <a:ext cx="2225123" cy="400110"/>
-          </a:xfrm>
-          <a:prstGeom prst="rect">
-            <a:avLst/>
-          </a:prstGeom>
-          <a:noFill/>
-        </p:spPr>
-        <p:txBody>
-          <a:bodyPr wrap="square">
-            <a:spAutoFit/>
-          </a:bodyPr>
-          <a:lstStyle/>
-          <a:p>
-            <a:pPr algn="ctr"/>
-            <a:r>
-              <a:rPr lang="en-US" sz="2000" b="1" dirty="0">
-                <a:solidFill>
-                  <a:srgbClr val="FFFF00"/>
-                </a:solidFill>
-                <a:effectLst>
-                  <a:outerShdw blurRad="50800" dist="38100" dir="5400000" algn="t" rotWithShape="0">
-                    <a:prstClr val="black">
-                      <a:alpha val="40000"/>
-                    </a:prstClr>
-                  </a:outerShdw>
-                </a:effectLst>
-                <a:latin typeface="Univers Condensed" panose="020B0506020202050204" pitchFamily="34" charset="0"/>
-              </a:rPr>
-              <a:t>Speakers:</a:t>
-            </a:r>
-          </a:p>
-        </p:txBody>
-      </p:sp>
     </p:spTree>
     <p:extLst>
       <p:ext uri="{BB962C8B-B14F-4D97-AF65-F5344CB8AC3E}">
